--- a/veille technologique epreuve BTS.pptx
+++ b/veille technologique epreuve BTS.pptx
@@ -5,19 +5,15 @@
     <p:sldMasterId id="2147483648" r:id="rId1"/>
   </p:sldMasterIdLst>
   <p:notesMasterIdLst>
-    <p:notesMasterId r:id="rId12"/>
+    <p:notesMasterId r:id="rId8"/>
   </p:notesMasterIdLst>
   <p:sldIdLst>
     <p:sldId id="256" r:id="rId2"/>
     <p:sldId id="257" r:id="rId3"/>
     <p:sldId id="258" r:id="rId4"/>
     <p:sldId id="259" r:id="rId5"/>
-    <p:sldId id="260" r:id="rId6"/>
-    <p:sldId id="261" r:id="rId7"/>
-    <p:sldId id="262" r:id="rId8"/>
-    <p:sldId id="264" r:id="rId9"/>
-    <p:sldId id="265" r:id="rId10"/>
-    <p:sldId id="266" r:id="rId11"/>
+    <p:sldId id="265" r:id="rId6"/>
+    <p:sldId id="266" r:id="rId7"/>
   </p:sldIdLst>
   <p:sldSz cx="14630400" cy="8229600"/>
   <p:notesSz cx="8229600" cy="14630400"/>
@@ -383,90 +379,6 @@
 </p:notes>
 </file>
 
-<file path=ppt/notesSlides/notesSlide10.xml><?xml version="1.0" encoding="utf-8"?>
-<p:notes xmlns:a="http://schemas.openxmlformats.org/drawingml/2006/main" xmlns:r="http://schemas.openxmlformats.org/officeDocument/2006/relationships" xmlns:p="http://schemas.openxmlformats.org/presentationml/2006/main">
-  <p:cSld>
-    <p:spTree>
-      <p:nvGrpSpPr>
-        <p:cNvPr id="1" name=""/>
-        <p:cNvGrpSpPr/>
-        <p:nvPr/>
-      </p:nvGrpSpPr>
-      <p:grpSpPr>
-        <a:xfrm>
-          <a:off x="0" y="0"/>
-          <a:ext cx="0" cy="0"/>
-          <a:chOff x="0" y="0"/>
-          <a:chExt cx="0" cy="0"/>
-        </a:xfrm>
-      </p:grpSpPr>
-      <p:sp>
-        <p:nvSpPr>
-          <p:cNvPr id="2" name="Slide Image Placeholder 1"/>
-          <p:cNvSpPr>
-            <a:spLocks noGrp="1" noRot="1" noChangeAspect="1"/>
-          </p:cNvSpPr>
-          <p:nvPr>
-            <p:ph type="sldImg"/>
-          </p:nvPr>
-        </p:nvSpPr>
-        <p:spPr/>
-      </p:sp>
-      <p:sp>
-        <p:nvSpPr>
-          <p:cNvPr id="3" name="Notes Placeholder 2"/>
-          <p:cNvSpPr>
-            <a:spLocks noGrp="1"/>
-          </p:cNvSpPr>
-          <p:nvPr>
-            <p:ph type="body" idx="1"/>
-          </p:nvPr>
-        </p:nvSpPr>
-        <p:spPr/>
-        <p:txBody>
-          <a:bodyPr/>
-          <a:lstStyle/>
-          <a:p>
-            <a:endParaRPr lang="en-US" dirty="0"/>
-          </a:p>
-        </p:txBody>
-      </p:sp>
-      <p:sp>
-        <p:nvSpPr>
-          <p:cNvPr id="4" name="Slide Number Placeholder 3"/>
-          <p:cNvSpPr>
-            <a:spLocks noGrp="1"/>
-          </p:cNvSpPr>
-          <p:nvPr>
-            <p:ph type="sldNum" sz="quarter" idx="10"/>
-          </p:nvPr>
-        </p:nvSpPr>
-        <p:spPr/>
-        <p:txBody>
-          <a:bodyPr/>
-          <a:lstStyle/>
-          <a:p>
-            <a:fld id="{F7021451-1387-4CA6-816F-3879F97B5CBC}" type="slidenum">
-              <a:rPr lang="en-US"/>
-              <a:t>10</a:t>
-            </a:fld>
-            <a:endParaRPr lang="en-US"/>
-          </a:p>
-        </p:txBody>
-      </p:sp>
-    </p:spTree>
-    <p:extLst>
-      <p:ext uri="{BB962C8B-B14F-4D97-AF65-F5344CB8AC3E}">
-        <p14:creationId xmlns:p14="http://schemas.microsoft.com/office/powerpoint/2010/main" val="1024086991"/>
-      </p:ext>
-    </p:extLst>
-  </p:cSld>
-  <p:clrMapOvr>
-    <a:masterClrMapping/>
-  </p:clrMapOvr>
-</p:notes>
-</file>
-
 <file path=ppt/notesSlides/notesSlide2.xml><?xml version="1.0" encoding="utf-8"?>
 <p:notes xmlns:a="http://schemas.openxmlformats.org/drawingml/2006/main" xmlns:r="http://schemas.openxmlformats.org/officeDocument/2006/relationships" xmlns:p="http://schemas.openxmlformats.org/presentationml/2006/main">
   <p:cSld>
@@ -869,258 +781,6 @@
             <a:fld id="{F7021451-1387-4CA6-816F-3879F97B5CBC}" type="slidenum">
               <a:rPr lang="en-US"/>
               <a:t>6</a:t>
-            </a:fld>
-            <a:endParaRPr lang="en-US"/>
-          </a:p>
-        </p:txBody>
-      </p:sp>
-    </p:spTree>
-    <p:extLst>
-      <p:ext uri="{BB962C8B-B14F-4D97-AF65-F5344CB8AC3E}">
-        <p14:creationId xmlns:p14="http://schemas.microsoft.com/office/powerpoint/2010/main" val="1024086991"/>
-      </p:ext>
-    </p:extLst>
-  </p:cSld>
-  <p:clrMapOvr>
-    <a:masterClrMapping/>
-  </p:clrMapOvr>
-</p:notes>
-</file>
-
-<file path=ppt/notesSlides/notesSlide7.xml><?xml version="1.0" encoding="utf-8"?>
-<p:notes xmlns:a="http://schemas.openxmlformats.org/drawingml/2006/main" xmlns:r="http://schemas.openxmlformats.org/officeDocument/2006/relationships" xmlns:p="http://schemas.openxmlformats.org/presentationml/2006/main">
-  <p:cSld>
-    <p:spTree>
-      <p:nvGrpSpPr>
-        <p:cNvPr id="1" name=""/>
-        <p:cNvGrpSpPr/>
-        <p:nvPr/>
-      </p:nvGrpSpPr>
-      <p:grpSpPr>
-        <a:xfrm>
-          <a:off x="0" y="0"/>
-          <a:ext cx="0" cy="0"/>
-          <a:chOff x="0" y="0"/>
-          <a:chExt cx="0" cy="0"/>
-        </a:xfrm>
-      </p:grpSpPr>
-      <p:sp>
-        <p:nvSpPr>
-          <p:cNvPr id="2" name="Slide Image Placeholder 1"/>
-          <p:cNvSpPr>
-            <a:spLocks noGrp="1" noRot="1" noChangeAspect="1"/>
-          </p:cNvSpPr>
-          <p:nvPr>
-            <p:ph type="sldImg"/>
-          </p:nvPr>
-        </p:nvSpPr>
-        <p:spPr/>
-      </p:sp>
-      <p:sp>
-        <p:nvSpPr>
-          <p:cNvPr id="3" name="Notes Placeholder 2"/>
-          <p:cNvSpPr>
-            <a:spLocks noGrp="1"/>
-          </p:cNvSpPr>
-          <p:nvPr>
-            <p:ph type="body" idx="1"/>
-          </p:nvPr>
-        </p:nvSpPr>
-        <p:spPr/>
-        <p:txBody>
-          <a:bodyPr/>
-          <a:lstStyle/>
-          <a:p>
-            <a:endParaRPr lang="en-US" dirty="0"/>
-          </a:p>
-        </p:txBody>
-      </p:sp>
-      <p:sp>
-        <p:nvSpPr>
-          <p:cNvPr id="4" name="Slide Number Placeholder 3"/>
-          <p:cNvSpPr>
-            <a:spLocks noGrp="1"/>
-          </p:cNvSpPr>
-          <p:nvPr>
-            <p:ph type="sldNum" sz="quarter" idx="10"/>
-          </p:nvPr>
-        </p:nvSpPr>
-        <p:spPr/>
-        <p:txBody>
-          <a:bodyPr/>
-          <a:lstStyle/>
-          <a:p>
-            <a:fld id="{F7021451-1387-4CA6-816F-3879F97B5CBC}" type="slidenum">
-              <a:rPr lang="en-US"/>
-              <a:t>7</a:t>
-            </a:fld>
-            <a:endParaRPr lang="en-US"/>
-          </a:p>
-        </p:txBody>
-      </p:sp>
-    </p:spTree>
-    <p:extLst>
-      <p:ext uri="{BB962C8B-B14F-4D97-AF65-F5344CB8AC3E}">
-        <p14:creationId xmlns:p14="http://schemas.microsoft.com/office/powerpoint/2010/main" val="1024086991"/>
-      </p:ext>
-    </p:extLst>
-  </p:cSld>
-  <p:clrMapOvr>
-    <a:masterClrMapping/>
-  </p:clrMapOvr>
-</p:notes>
-</file>
-
-<file path=ppt/notesSlides/notesSlide8.xml><?xml version="1.0" encoding="utf-8"?>
-<p:notes xmlns:a="http://schemas.openxmlformats.org/drawingml/2006/main" xmlns:r="http://schemas.openxmlformats.org/officeDocument/2006/relationships" xmlns:p="http://schemas.openxmlformats.org/presentationml/2006/main">
-  <p:cSld>
-    <p:spTree>
-      <p:nvGrpSpPr>
-        <p:cNvPr id="1" name=""/>
-        <p:cNvGrpSpPr/>
-        <p:nvPr/>
-      </p:nvGrpSpPr>
-      <p:grpSpPr>
-        <a:xfrm>
-          <a:off x="0" y="0"/>
-          <a:ext cx="0" cy="0"/>
-          <a:chOff x="0" y="0"/>
-          <a:chExt cx="0" cy="0"/>
-        </a:xfrm>
-      </p:grpSpPr>
-      <p:sp>
-        <p:nvSpPr>
-          <p:cNvPr id="2" name="Slide Image Placeholder 1"/>
-          <p:cNvSpPr>
-            <a:spLocks noGrp="1" noRot="1" noChangeAspect="1"/>
-          </p:cNvSpPr>
-          <p:nvPr>
-            <p:ph type="sldImg"/>
-          </p:nvPr>
-        </p:nvSpPr>
-        <p:spPr/>
-      </p:sp>
-      <p:sp>
-        <p:nvSpPr>
-          <p:cNvPr id="3" name="Notes Placeholder 2"/>
-          <p:cNvSpPr>
-            <a:spLocks noGrp="1"/>
-          </p:cNvSpPr>
-          <p:nvPr>
-            <p:ph type="body" idx="1"/>
-          </p:nvPr>
-        </p:nvSpPr>
-        <p:spPr/>
-        <p:txBody>
-          <a:bodyPr/>
-          <a:lstStyle/>
-          <a:p>
-            <a:endParaRPr lang="en-US" dirty="0"/>
-          </a:p>
-        </p:txBody>
-      </p:sp>
-      <p:sp>
-        <p:nvSpPr>
-          <p:cNvPr id="4" name="Slide Number Placeholder 3"/>
-          <p:cNvSpPr>
-            <a:spLocks noGrp="1"/>
-          </p:cNvSpPr>
-          <p:nvPr>
-            <p:ph type="sldNum" sz="quarter" idx="10"/>
-          </p:nvPr>
-        </p:nvSpPr>
-        <p:spPr/>
-        <p:txBody>
-          <a:bodyPr/>
-          <a:lstStyle/>
-          <a:p>
-            <a:fld id="{F7021451-1387-4CA6-816F-3879F97B5CBC}" type="slidenum">
-              <a:rPr lang="en-US"/>
-              <a:t>8</a:t>
-            </a:fld>
-            <a:endParaRPr lang="en-US"/>
-          </a:p>
-        </p:txBody>
-      </p:sp>
-    </p:spTree>
-    <p:extLst>
-      <p:ext uri="{BB962C8B-B14F-4D97-AF65-F5344CB8AC3E}">
-        <p14:creationId xmlns:p14="http://schemas.microsoft.com/office/powerpoint/2010/main" val="1024086991"/>
-      </p:ext>
-    </p:extLst>
-  </p:cSld>
-  <p:clrMapOvr>
-    <a:masterClrMapping/>
-  </p:clrMapOvr>
-</p:notes>
-</file>
-
-<file path=ppt/notesSlides/notesSlide9.xml><?xml version="1.0" encoding="utf-8"?>
-<p:notes xmlns:a="http://schemas.openxmlformats.org/drawingml/2006/main" xmlns:r="http://schemas.openxmlformats.org/officeDocument/2006/relationships" xmlns:p="http://schemas.openxmlformats.org/presentationml/2006/main">
-  <p:cSld>
-    <p:spTree>
-      <p:nvGrpSpPr>
-        <p:cNvPr id="1" name=""/>
-        <p:cNvGrpSpPr/>
-        <p:nvPr/>
-      </p:nvGrpSpPr>
-      <p:grpSpPr>
-        <a:xfrm>
-          <a:off x="0" y="0"/>
-          <a:ext cx="0" cy="0"/>
-          <a:chOff x="0" y="0"/>
-          <a:chExt cx="0" cy="0"/>
-        </a:xfrm>
-      </p:grpSpPr>
-      <p:sp>
-        <p:nvSpPr>
-          <p:cNvPr id="2" name="Slide Image Placeholder 1"/>
-          <p:cNvSpPr>
-            <a:spLocks noGrp="1" noRot="1" noChangeAspect="1"/>
-          </p:cNvSpPr>
-          <p:nvPr>
-            <p:ph type="sldImg"/>
-          </p:nvPr>
-        </p:nvSpPr>
-        <p:spPr/>
-      </p:sp>
-      <p:sp>
-        <p:nvSpPr>
-          <p:cNvPr id="3" name="Notes Placeholder 2"/>
-          <p:cNvSpPr>
-            <a:spLocks noGrp="1"/>
-          </p:cNvSpPr>
-          <p:nvPr>
-            <p:ph type="body" idx="1"/>
-          </p:nvPr>
-        </p:nvSpPr>
-        <p:spPr/>
-        <p:txBody>
-          <a:bodyPr/>
-          <a:lstStyle/>
-          <a:p>
-            <a:endParaRPr lang="en-US" dirty="0"/>
-          </a:p>
-        </p:txBody>
-      </p:sp>
-      <p:sp>
-        <p:nvSpPr>
-          <p:cNvPr id="4" name="Slide Number Placeholder 3"/>
-          <p:cNvSpPr>
-            <a:spLocks noGrp="1"/>
-          </p:cNvSpPr>
-          <p:nvPr>
-            <p:ph type="sldNum" sz="quarter" idx="10"/>
-          </p:nvPr>
-        </p:nvSpPr>
-        <p:spPr/>
-        <p:txBody>
-          <a:bodyPr/>
-          <a:lstStyle/>
-          <a:p>
-            <a:fld id="{F7021451-1387-4CA6-816F-3879F97B5CBC}" type="slidenum">
-              <a:rPr lang="en-US"/>
-              <a:t>9</a:t>
             </a:fld>
             <a:endParaRPr lang="en-US"/>
           </a:p>
@@ -1573,7 +1233,7 @@
               <a:buNone/>
             </a:pPr>
             <a:r>
-              <a:rPr lang="en-US" sz="6036" b="1" dirty="0">
+              <a:rPr lang="en-US" sz="6036" b="1" dirty="0" err="1">
                 <a:solidFill>
                   <a:srgbClr val="F0FCFF"/>
                 </a:solidFill>
@@ -1581,7 +1241,7 @@
                 <a:ea typeface="Spline Sans" pitchFamily="34" charset="-122"/>
                 <a:cs typeface="Spline Sans" pitchFamily="34" charset="-120"/>
               </a:rPr>
-              <a:t>Introduction à Vigicare</a:t>
+              <a:t>Vigicare</a:t>
             </a:r>
             <a:endParaRPr lang="en-US" sz="6036" dirty="0"/>
           </a:p>
@@ -1657,361 +1317,6 @@
               <a:buNone/>
             </a:pPr>
             <a:endParaRPr lang="en-US" sz="1152" dirty="0"/>
-          </a:p>
-        </p:txBody>
-      </p:sp>
-    </p:spTree>
-  </p:cSld>
-  <p:clrMapOvr>
-    <a:masterClrMapping/>
-  </p:clrMapOvr>
-</p:sld>
-</file>
-
-<file path=ppt/slides/slide10.xml><?xml version="1.0" encoding="utf-8"?>
-<p:sld xmlns:a="http://schemas.openxmlformats.org/drawingml/2006/main" xmlns:r="http://schemas.openxmlformats.org/officeDocument/2006/relationships" xmlns:p="http://schemas.openxmlformats.org/presentationml/2006/main">
-  <p:cSld name="Slide 11">
-    <p:spTree>
-      <p:nvGrpSpPr>
-        <p:cNvPr id="1" name=""/>
-        <p:cNvGrpSpPr/>
-        <p:nvPr/>
-      </p:nvGrpSpPr>
-      <p:grpSpPr>
-        <a:xfrm>
-          <a:off x="0" y="0"/>
-          <a:ext cx="0" cy="0"/>
-          <a:chOff x="0" y="0"/>
-          <a:chExt cx="0" cy="0"/>
-        </a:xfrm>
-      </p:grpSpPr>
-      <p:pic>
-        <p:nvPicPr>
-          <p:cNvPr id="2" name="Image 0" descr="preencoded.png"/>
-          <p:cNvPicPr>
-            <a:picLocks noChangeAspect="1"/>
-          </p:cNvPicPr>
-          <p:nvPr/>
-        </p:nvPicPr>
-        <p:blipFill>
-          <a:blip r:embed="rId3"/>
-          <a:stretch>
-            <a:fillRect/>
-          </a:stretch>
-        </p:blipFill>
-        <p:spPr>
-          <a:xfrm>
-            <a:off x="0" y="0"/>
-            <a:ext cx="14630400" cy="8229600"/>
-          </a:xfrm>
-          <a:prstGeom prst="rect">
-            <a:avLst/>
-          </a:prstGeom>
-        </p:spPr>
-      </p:pic>
-      <p:sp>
-        <p:nvSpPr>
-          <p:cNvPr id="3" name="Shape 0"/>
-          <p:cNvSpPr/>
-          <p:nvPr/>
-        </p:nvSpPr>
-        <p:spPr>
-          <a:xfrm>
-            <a:off x="0" y="0"/>
-            <a:ext cx="14630400" cy="8229600"/>
-          </a:xfrm>
-          <a:prstGeom prst="rect">
-            <a:avLst/>
-          </a:prstGeom>
-          <a:solidFill>
-            <a:srgbClr val="0A081B">
-              <a:alpha val="75000"/>
-            </a:srgbClr>
-          </a:solidFill>
-          <a:ln/>
-        </p:spPr>
-        <p:txBody>
-          <a:bodyPr/>
-          <a:lstStyle/>
-          <a:p>
-            <a:endParaRPr lang="fr-FR"/>
-          </a:p>
-        </p:txBody>
-      </p:sp>
-      <p:sp>
-        <p:nvSpPr>
-          <p:cNvPr id="4" name="Text 1"/>
-          <p:cNvSpPr/>
-          <p:nvPr/>
-        </p:nvSpPr>
-        <p:spPr>
-          <a:xfrm>
-            <a:off x="2624376" y="2220992"/>
-            <a:ext cx="5554980" cy="694373"/>
-          </a:xfrm>
-          <a:prstGeom prst="rect">
-            <a:avLst/>
-          </a:prstGeom>
-          <a:noFill/>
-          <a:ln/>
-        </p:spPr>
-        <p:txBody>
-          <a:bodyPr wrap="none" rtlCol="0" anchor="t"/>
-          <a:lstStyle/>
-          <a:p>
-            <a:pPr marL="0" indent="0">
-              <a:lnSpc>
-                <a:spcPts val="5468"/>
-              </a:lnSpc>
-              <a:buNone/>
-            </a:pPr>
-            <a:r>
-              <a:rPr lang="en-US" sz="4374" b="1" dirty="0">
-                <a:solidFill>
-                  <a:srgbClr val="F0FCFF"/>
-                </a:solidFill>
-                <a:latin typeface="Spline Sans" pitchFamily="34" charset="0"/>
-                <a:ea typeface="Spline Sans" pitchFamily="34" charset="-122"/>
-                <a:cs typeface="Spline Sans" pitchFamily="34" charset="-120"/>
-              </a:rPr>
-              <a:t>Sources</a:t>
-            </a:r>
-            <a:endParaRPr lang="en-US" sz="4374" dirty="0"/>
-          </a:p>
-        </p:txBody>
-      </p:sp>
-      <p:sp>
-        <p:nvSpPr>
-          <p:cNvPr id="5" name="Text 2"/>
-          <p:cNvSpPr/>
-          <p:nvPr/>
-        </p:nvSpPr>
-        <p:spPr>
-          <a:xfrm>
-            <a:off x="2624376" y="3359706"/>
-            <a:ext cx="9381649" cy="710803"/>
-          </a:xfrm>
-          <a:prstGeom prst="rect">
-            <a:avLst/>
-          </a:prstGeom>
-          <a:noFill/>
-          <a:ln/>
-        </p:spPr>
-        <p:txBody>
-          <a:bodyPr wrap="square" rtlCol="0" anchor="t"/>
-          <a:lstStyle/>
-          <a:p>
-            <a:pPr marL="0" indent="0">
-              <a:lnSpc>
-                <a:spcPts val="2799"/>
-              </a:lnSpc>
-              <a:buNone/>
-            </a:pPr>
-            <a:r>
-              <a:rPr lang="en-US" sz="1750" dirty="0">
-                <a:solidFill>
-                  <a:srgbClr val="E0E4E6"/>
-                </a:solidFill>
-                <a:latin typeface="Barlow" pitchFamily="34" charset="0"/>
-                <a:ea typeface="Barlow" pitchFamily="34" charset="-122"/>
-                <a:cs typeface="Barlow" pitchFamily="34" charset="-120"/>
-              </a:rPr>
-              <a:t>Les informations présentées dans cette veille technologique proviennent de diverses sources fiables, notamment :</a:t>
-            </a:r>
-            <a:endParaRPr lang="en-US" sz="1750" dirty="0"/>
-          </a:p>
-        </p:txBody>
-      </p:sp>
-      <p:sp>
-        <p:nvSpPr>
-          <p:cNvPr id="6" name="Text 3"/>
-          <p:cNvSpPr/>
-          <p:nvPr/>
-        </p:nvSpPr>
-        <p:spPr>
-          <a:xfrm>
-            <a:off x="2979777" y="4320421"/>
-            <a:ext cx="9026247" cy="355402"/>
-          </a:xfrm>
-          <a:prstGeom prst="rect">
-            <a:avLst/>
-          </a:prstGeom>
-          <a:noFill/>
-          <a:ln/>
-        </p:spPr>
-        <p:txBody>
-          <a:bodyPr wrap="none" rtlCol="0" anchor="t"/>
-          <a:lstStyle/>
-          <a:p>
-            <a:pPr marL="342900" indent="-342900" algn="l">
-              <a:lnSpc>
-                <a:spcPts val="2799"/>
-              </a:lnSpc>
-              <a:buSzPct val="100000"/>
-              <a:buChar char="•"/>
-            </a:pPr>
-            <a:r>
-              <a:rPr lang="en-US" sz="1750" u="sng" dirty="0">
-                <a:solidFill>
-                  <a:srgbClr val="16FFBB"/>
-                </a:solidFill>
-                <a:latin typeface="Barlow" pitchFamily="34" charset="0"/>
-                <a:ea typeface="Barlow" pitchFamily="34" charset="-122"/>
-                <a:cs typeface="Barlow" pitchFamily="34" charset="-120"/>
-                <a:hlinkClick r:id="rId4">
-                  <a:extLst>
-                    <a:ext uri="{A12FA001-AC4F-418D-AE19-62706E023703}">
-                      <ahyp:hlinkClr xmlns:ahyp="http://schemas.microsoft.com/office/drawing/2018/hyperlinkcolor" val="tx"/>
-                    </a:ext>
-                  </a:extLst>
-                </a:hlinkClick>
-              </a:rPr>
-              <a:t>Healthcare IT Today</a:t>
-            </a:r>
-            <a:endParaRPr lang="en-US" sz="1750" dirty="0"/>
-          </a:p>
-        </p:txBody>
-      </p:sp>
-      <p:sp>
-        <p:nvSpPr>
-          <p:cNvPr id="7" name="Text 4"/>
-          <p:cNvSpPr/>
-          <p:nvPr/>
-        </p:nvSpPr>
-        <p:spPr>
-          <a:xfrm>
-            <a:off x="2979777" y="4764643"/>
-            <a:ext cx="9026247" cy="355402"/>
-          </a:xfrm>
-          <a:prstGeom prst="rect">
-            <a:avLst/>
-          </a:prstGeom>
-          <a:noFill/>
-          <a:ln/>
-        </p:spPr>
-        <p:txBody>
-          <a:bodyPr wrap="none" rtlCol="0" anchor="t"/>
-          <a:lstStyle/>
-          <a:p>
-            <a:pPr marL="342900" indent="-342900" algn="l">
-              <a:lnSpc>
-                <a:spcPts val="2799"/>
-              </a:lnSpc>
-              <a:buSzPct val="100000"/>
-              <a:buChar char="•"/>
-            </a:pPr>
-            <a:r>
-              <a:rPr lang="en-US" sz="1750" u="sng" dirty="0">
-                <a:solidFill>
-                  <a:srgbClr val="16FFBB"/>
-                </a:solidFill>
-                <a:latin typeface="Barlow" pitchFamily="34" charset="0"/>
-                <a:ea typeface="Barlow" pitchFamily="34" charset="-122"/>
-                <a:cs typeface="Barlow" pitchFamily="34" charset="-120"/>
-                <a:hlinkClick r:id="rId5">
-                  <a:extLst>
-                    <a:ext uri="{A12FA001-AC4F-418D-AE19-62706E023703}">
-                      <ahyp:hlinkClr xmlns:ahyp="http://schemas.microsoft.com/office/drawing/2018/hyperlinkcolor" val="tx"/>
-                    </a:ext>
-                  </a:extLst>
-                </a:hlinkClick>
-              </a:rPr>
-              <a:t>McKinsey &amp; Company</a:t>
-            </a:r>
-            <a:endParaRPr lang="en-US" sz="1750" dirty="0"/>
-          </a:p>
-        </p:txBody>
-      </p:sp>
-      <p:sp>
-        <p:nvSpPr>
-          <p:cNvPr id="8" name="Text 5"/>
-          <p:cNvSpPr/>
-          <p:nvPr/>
-        </p:nvSpPr>
-        <p:spPr>
-          <a:xfrm>
-            <a:off x="2979777" y="5208865"/>
-            <a:ext cx="9026247" cy="355402"/>
-          </a:xfrm>
-          <a:prstGeom prst="rect">
-            <a:avLst/>
-          </a:prstGeom>
-          <a:noFill/>
-          <a:ln/>
-        </p:spPr>
-        <p:txBody>
-          <a:bodyPr wrap="none" rtlCol="0" anchor="t"/>
-          <a:lstStyle/>
-          <a:p>
-            <a:pPr marL="342900" indent="-342900" algn="l">
-              <a:lnSpc>
-                <a:spcPts val="2799"/>
-              </a:lnSpc>
-              <a:buSzPct val="100000"/>
-              <a:buChar char="•"/>
-            </a:pPr>
-            <a:r>
-              <a:rPr lang="en-US" sz="1750" u="sng" dirty="0">
-                <a:solidFill>
-                  <a:srgbClr val="16FFBB"/>
-                </a:solidFill>
-                <a:latin typeface="Barlow" pitchFamily="34" charset="0"/>
-                <a:ea typeface="Barlow" pitchFamily="34" charset="-122"/>
-                <a:cs typeface="Barlow" pitchFamily="34" charset="-120"/>
-                <a:hlinkClick r:id="rId6">
-                  <a:extLst>
-                    <a:ext uri="{A12FA001-AC4F-418D-AE19-62706E023703}">
-                      <ahyp:hlinkClr xmlns:ahyp="http://schemas.microsoft.com/office/drawing/2018/hyperlinkcolor" val="tx"/>
-                    </a:ext>
-                  </a:extLst>
-                </a:hlinkClick>
-              </a:rPr>
-              <a:t>Gartner</a:t>
-            </a:r>
-            <a:endParaRPr lang="en-US" sz="1750" dirty="0"/>
-          </a:p>
-        </p:txBody>
-      </p:sp>
-      <p:sp>
-        <p:nvSpPr>
-          <p:cNvPr id="9" name="Text 6"/>
-          <p:cNvSpPr/>
-          <p:nvPr/>
-        </p:nvSpPr>
-        <p:spPr>
-          <a:xfrm>
-            <a:off x="2979777" y="5653088"/>
-            <a:ext cx="9026247" cy="355402"/>
-          </a:xfrm>
-          <a:prstGeom prst="rect">
-            <a:avLst/>
-          </a:prstGeom>
-          <a:noFill/>
-          <a:ln/>
-        </p:spPr>
-        <p:txBody>
-          <a:bodyPr wrap="none" rtlCol="0" anchor="t"/>
-          <a:lstStyle/>
-          <a:p>
-            <a:pPr marL="342900" indent="-342900" algn="l">
-              <a:lnSpc>
-                <a:spcPts val="2799"/>
-              </a:lnSpc>
-              <a:buSzPct val="100000"/>
-              <a:buChar char="•"/>
-            </a:pPr>
-            <a:r>
-              <a:rPr lang="en-US" sz="1750" dirty="0">
-                <a:solidFill>
-                  <a:srgbClr val="E0E4E6"/>
-                </a:solidFill>
-                <a:latin typeface="Barlow" pitchFamily="34" charset="0"/>
-                <a:ea typeface="Barlow" pitchFamily="34" charset="-122"/>
-                <a:cs typeface="Barlow" pitchFamily="34" charset="-120"/>
-              </a:rPr>
-              <a:t>Forbes</a:t>
-            </a:r>
-            <a:endParaRPr lang="en-US" sz="1750" dirty="0"/>
           </a:p>
         </p:txBody>
       </p:sp>
@@ -2145,6 +1450,17 @@
               <a:buNone/>
             </a:pPr>
             <a:r>
+              <a:rPr lang="en-US" sz="4374" b="1" dirty="0" err="1">
+                <a:solidFill>
+                  <a:srgbClr val="F0FCFF"/>
+                </a:solidFill>
+                <a:latin typeface="Spline Sans" pitchFamily="34" charset="0"/>
+                <a:ea typeface="Spline Sans" pitchFamily="34" charset="-122"/>
+                <a:cs typeface="Spline Sans" pitchFamily="34" charset="-120"/>
+              </a:rPr>
+              <a:t>Vigicare</a:t>
+            </a:r>
+            <a:r>
               <a:rPr lang="en-US" sz="4374" b="1" dirty="0">
                 <a:solidFill>
                   <a:srgbClr val="F0FCFF"/>
@@ -2153,7 +1469,7 @@
                 <a:ea typeface="Spline Sans" pitchFamily="34" charset="-122"/>
                 <a:cs typeface="Spline Sans" pitchFamily="34" charset="-120"/>
               </a:rPr>
-              <a:t>Veille technologique Vigicare 2022</a:t>
+              <a:t> 2022</a:t>
             </a:r>
             <a:endParaRPr lang="en-US" sz="4374" dirty="0"/>
           </a:p>
@@ -2853,6 +2169,17 @@
               <a:buNone/>
             </a:pPr>
             <a:r>
+              <a:rPr lang="en-US" sz="4374" b="1" dirty="0" err="1">
+                <a:solidFill>
+                  <a:srgbClr val="F0FCFF"/>
+                </a:solidFill>
+                <a:latin typeface="Spline Sans" pitchFamily="34" charset="0"/>
+                <a:ea typeface="Spline Sans" pitchFamily="34" charset="-122"/>
+                <a:cs typeface="Spline Sans" pitchFamily="34" charset="-120"/>
+              </a:rPr>
+              <a:t>Vigicare</a:t>
+            </a:r>
+            <a:r>
               <a:rPr lang="en-US" sz="4374" b="1" dirty="0">
                 <a:solidFill>
                   <a:srgbClr val="F0FCFF"/>
@@ -2861,7 +2188,7 @@
                 <a:ea typeface="Spline Sans" pitchFamily="34" charset="-122"/>
                 <a:cs typeface="Spline Sans" pitchFamily="34" charset="-120"/>
               </a:rPr>
-              <a:t>Veille technologique Vigicare 2023</a:t>
+              <a:t> 2023</a:t>
             </a:r>
             <a:endParaRPr lang="en-US" sz="4374" dirty="0"/>
           </a:p>
@@ -3225,6 +2552,17 @@
               <a:buNone/>
             </a:pPr>
             <a:r>
+              <a:rPr lang="en-US" sz="4374" b="1" dirty="0" err="1">
+                <a:solidFill>
+                  <a:srgbClr val="F0FCFF"/>
+                </a:solidFill>
+                <a:latin typeface="Spline Sans" pitchFamily="34" charset="0"/>
+                <a:ea typeface="Spline Sans" pitchFamily="34" charset="-122"/>
+                <a:cs typeface="Spline Sans" pitchFamily="34" charset="-120"/>
+              </a:rPr>
+              <a:t>Vigicare</a:t>
+            </a:r>
+            <a:r>
               <a:rPr lang="en-US" sz="4374" b="1" dirty="0">
                 <a:solidFill>
                   <a:srgbClr val="F0FCFF"/>
@@ -3233,7 +2571,7 @@
                 <a:ea typeface="Spline Sans" pitchFamily="34" charset="-122"/>
                 <a:cs typeface="Spline Sans" pitchFamily="34" charset="-120"/>
               </a:rPr>
-              <a:t>Veille technologique Vigicare 2024</a:t>
+              <a:t> 2024</a:t>
             </a:r>
             <a:endParaRPr lang="en-US" sz="4374" dirty="0"/>
           </a:p>
@@ -3602,2282 +2940,6 @@
 </file>
 
 <file path=ppt/slides/slide5.xml><?xml version="1.0" encoding="utf-8"?>
-<p:sld xmlns:a="http://schemas.openxmlformats.org/drawingml/2006/main" xmlns:r="http://schemas.openxmlformats.org/officeDocument/2006/relationships" xmlns:p="http://schemas.openxmlformats.org/presentationml/2006/main">
-  <p:cSld name="Slide 5">
-    <p:spTree>
-      <p:nvGrpSpPr>
-        <p:cNvPr id="1" name=""/>
-        <p:cNvGrpSpPr/>
-        <p:nvPr/>
-      </p:nvGrpSpPr>
-      <p:grpSpPr>
-        <a:xfrm>
-          <a:off x="0" y="0"/>
-          <a:ext cx="0" cy="0"/>
-          <a:chOff x="0" y="0"/>
-          <a:chExt cx="0" cy="0"/>
-        </a:xfrm>
-      </p:grpSpPr>
-      <p:pic>
-        <p:nvPicPr>
-          <p:cNvPr id="2" name="Image 0" descr="preencoded.png"/>
-          <p:cNvPicPr>
-            <a:picLocks noChangeAspect="1"/>
-          </p:cNvPicPr>
-          <p:nvPr/>
-        </p:nvPicPr>
-        <p:blipFill>
-          <a:blip r:embed="rId3"/>
-          <a:stretch>
-            <a:fillRect/>
-          </a:stretch>
-        </p:blipFill>
-        <p:spPr>
-          <a:xfrm>
-            <a:off x="0" y="0"/>
-            <a:ext cx="14630400" cy="8229600"/>
-          </a:xfrm>
-          <a:prstGeom prst="rect">
-            <a:avLst/>
-          </a:prstGeom>
-        </p:spPr>
-      </p:pic>
-      <p:sp>
-        <p:nvSpPr>
-          <p:cNvPr id="3" name="Shape 0"/>
-          <p:cNvSpPr/>
-          <p:nvPr/>
-        </p:nvSpPr>
-        <p:spPr>
-          <a:xfrm>
-            <a:off x="0" y="0"/>
-            <a:ext cx="14630400" cy="8229600"/>
-          </a:xfrm>
-          <a:prstGeom prst="rect">
-            <a:avLst/>
-          </a:prstGeom>
-          <a:solidFill>
-            <a:srgbClr val="0A081B">
-              <a:alpha val="75000"/>
-            </a:srgbClr>
-          </a:solidFill>
-          <a:ln/>
-        </p:spPr>
-        <p:txBody>
-          <a:bodyPr/>
-          <a:lstStyle/>
-          <a:p>
-            <a:endParaRPr lang="fr-FR"/>
-          </a:p>
-        </p:txBody>
-      </p:sp>
-      <p:sp>
-        <p:nvSpPr>
-          <p:cNvPr id="4" name="Text 1"/>
-          <p:cNvSpPr/>
-          <p:nvPr/>
-        </p:nvSpPr>
-        <p:spPr>
-          <a:xfrm>
-            <a:off x="3135273" y="545544"/>
-            <a:ext cx="8359854" cy="1237298"/>
-          </a:xfrm>
-          <a:prstGeom prst="rect">
-            <a:avLst/>
-          </a:prstGeom>
-          <a:noFill/>
-          <a:ln/>
-        </p:spPr>
-        <p:txBody>
-          <a:bodyPr wrap="square" rtlCol="0" anchor="t"/>
-          <a:lstStyle/>
-          <a:p>
-            <a:pPr marL="0" indent="0">
-              <a:lnSpc>
-                <a:spcPts val="4872"/>
-              </a:lnSpc>
-              <a:buNone/>
-            </a:pPr>
-            <a:r>
-              <a:rPr lang="en-US" sz="3898" b="1" dirty="0">
-                <a:solidFill>
-                  <a:srgbClr val="F0FCFF"/>
-                </a:solidFill>
-                <a:latin typeface="Spline Sans" pitchFamily="34" charset="0"/>
-                <a:ea typeface="Spline Sans" pitchFamily="34" charset="-122"/>
-                <a:cs typeface="Spline Sans" pitchFamily="34" charset="-120"/>
-              </a:rPr>
-              <a:t>Différences entre Vigicare 2022, 2023 et 2024</a:t>
-            </a:r>
-            <a:endParaRPr lang="en-US" sz="3898" dirty="0"/>
-          </a:p>
-        </p:txBody>
-      </p:sp>
-      <p:sp>
-        <p:nvSpPr>
-          <p:cNvPr id="5" name="Text 2"/>
-          <p:cNvSpPr/>
-          <p:nvPr/>
-        </p:nvSpPr>
-        <p:spPr>
-          <a:xfrm>
-            <a:off x="3135273" y="2277666"/>
-            <a:ext cx="1727716" cy="1237298"/>
-          </a:xfrm>
-          <a:prstGeom prst="rect">
-            <a:avLst/>
-          </a:prstGeom>
-          <a:noFill/>
-          <a:ln/>
-        </p:spPr>
-        <p:txBody>
-          <a:bodyPr wrap="square" rtlCol="0" anchor="t"/>
-          <a:lstStyle/>
-          <a:p>
-            <a:pPr marL="0" indent="0">
-              <a:lnSpc>
-                <a:spcPts val="2436"/>
-              </a:lnSpc>
-              <a:buNone/>
-            </a:pPr>
-            <a:r>
-              <a:rPr lang="en-US" sz="1949" b="1" dirty="0">
-                <a:solidFill>
-                  <a:srgbClr val="F0FCFF"/>
-                </a:solidFill>
-                <a:latin typeface="Spline Sans" pitchFamily="34" charset="0"/>
-                <a:ea typeface="Spline Sans" pitchFamily="34" charset="-122"/>
-                <a:cs typeface="Spline Sans" pitchFamily="34" charset="-120"/>
-              </a:rPr>
-              <a:t>Intelligence Artificielle et Analyse de Données</a:t>
-            </a:r>
-            <a:endParaRPr lang="en-US" sz="1949" dirty="0"/>
-          </a:p>
-        </p:txBody>
-      </p:sp>
-      <p:sp>
-        <p:nvSpPr>
-          <p:cNvPr id="6" name="Text 3"/>
-          <p:cNvSpPr/>
-          <p:nvPr/>
-        </p:nvSpPr>
-        <p:spPr>
-          <a:xfrm>
-            <a:off x="3135273" y="3712845"/>
-            <a:ext cx="1727716" cy="2216944"/>
-          </a:xfrm>
-          <a:prstGeom prst="rect">
-            <a:avLst/>
-          </a:prstGeom>
-          <a:noFill/>
-          <a:ln/>
-        </p:spPr>
-        <p:txBody>
-          <a:bodyPr wrap="square" rtlCol="0" anchor="t"/>
-          <a:lstStyle/>
-          <a:p>
-            <a:pPr marL="0" indent="0">
-              <a:lnSpc>
-                <a:spcPts val="2494"/>
-              </a:lnSpc>
-              <a:buNone/>
-            </a:pPr>
-            <a:r>
-              <a:rPr lang="en-US" sz="1559" dirty="0">
-                <a:solidFill>
-                  <a:srgbClr val="E0E4E6"/>
-                </a:solidFill>
-                <a:latin typeface="Barlow" pitchFamily="34" charset="0"/>
-                <a:ea typeface="Barlow" pitchFamily="34" charset="-122"/>
-                <a:cs typeface="Barlow" pitchFamily="34" charset="-120"/>
-              </a:rPr>
-              <a:t>En 2022, Vigicare a mis l'accent sur l'IA et l'analyse prédictive pour améliorer le diagnostic et le suivi des patients.</a:t>
-            </a:r>
-            <a:endParaRPr lang="en-US" sz="1559" dirty="0"/>
-          </a:p>
-        </p:txBody>
-      </p:sp>
-      <p:sp>
-        <p:nvSpPr>
-          <p:cNvPr id="7" name="Text 4"/>
-          <p:cNvSpPr/>
-          <p:nvPr/>
-        </p:nvSpPr>
-        <p:spPr>
-          <a:xfrm>
-            <a:off x="5353526" y="2277666"/>
-            <a:ext cx="1727716" cy="927973"/>
-          </a:xfrm>
-          <a:prstGeom prst="rect">
-            <a:avLst/>
-          </a:prstGeom>
-          <a:noFill/>
-          <a:ln/>
-        </p:spPr>
-        <p:txBody>
-          <a:bodyPr wrap="square" rtlCol="0" anchor="t"/>
-          <a:lstStyle/>
-          <a:p>
-            <a:pPr marL="0" indent="0">
-              <a:lnSpc>
-                <a:spcPts val="2436"/>
-              </a:lnSpc>
-              <a:buNone/>
-            </a:pPr>
-            <a:r>
-              <a:rPr lang="en-US" sz="1949" b="1" dirty="0">
-                <a:solidFill>
-                  <a:srgbClr val="F0FCFF"/>
-                </a:solidFill>
-                <a:latin typeface="Spline Sans" pitchFamily="34" charset="0"/>
-                <a:ea typeface="Spline Sans" pitchFamily="34" charset="-122"/>
-                <a:cs typeface="Spline Sans" pitchFamily="34" charset="-120"/>
-              </a:rPr>
-              <a:t>Blockchain et Santé Connectée</a:t>
-            </a:r>
-            <a:endParaRPr lang="en-US" sz="1949" dirty="0"/>
-          </a:p>
-        </p:txBody>
-      </p:sp>
-      <p:sp>
-        <p:nvSpPr>
-          <p:cNvPr id="8" name="Text 5"/>
-          <p:cNvSpPr/>
-          <p:nvPr/>
-        </p:nvSpPr>
-        <p:spPr>
-          <a:xfrm>
-            <a:off x="5353526" y="3403521"/>
-            <a:ext cx="1727716" cy="3167063"/>
-          </a:xfrm>
-          <a:prstGeom prst="rect">
-            <a:avLst/>
-          </a:prstGeom>
-          <a:noFill/>
-          <a:ln/>
-        </p:spPr>
-        <p:txBody>
-          <a:bodyPr wrap="square" rtlCol="0" anchor="t"/>
-          <a:lstStyle/>
-          <a:p>
-            <a:pPr marL="0" indent="0">
-              <a:lnSpc>
-                <a:spcPts val="2494"/>
-              </a:lnSpc>
-              <a:buNone/>
-            </a:pPr>
-            <a:r>
-              <a:rPr lang="en-US" sz="1559" dirty="0">
-                <a:solidFill>
-                  <a:srgbClr val="E0E4E6"/>
-                </a:solidFill>
-                <a:latin typeface="Barlow" pitchFamily="34" charset="0"/>
-                <a:ea typeface="Barlow" pitchFamily="34" charset="-122"/>
-                <a:cs typeface="Barlow" pitchFamily="34" charset="-120"/>
-              </a:rPr>
-              <a:t>En 2023, l'exploration de la blockchain pour sécuriser les données de santé a été une priorité, tandis qu'en 2024, Vigicare s'est concentré sur la santé connectée.</a:t>
-            </a:r>
-            <a:endParaRPr lang="en-US" sz="1559" dirty="0"/>
-          </a:p>
-        </p:txBody>
-      </p:sp>
-      <p:sp>
-        <p:nvSpPr>
-          <p:cNvPr id="9" name="Text 6"/>
-          <p:cNvSpPr/>
-          <p:nvPr/>
-        </p:nvSpPr>
-        <p:spPr>
-          <a:xfrm>
-            <a:off x="7571780" y="2277666"/>
-            <a:ext cx="1727716" cy="1237298"/>
-          </a:xfrm>
-          <a:prstGeom prst="rect">
-            <a:avLst/>
-          </a:prstGeom>
-          <a:noFill/>
-          <a:ln/>
-        </p:spPr>
-        <p:txBody>
-          <a:bodyPr wrap="square" rtlCol="0" anchor="t"/>
-          <a:lstStyle/>
-          <a:p>
-            <a:pPr marL="0" indent="0">
-              <a:lnSpc>
-                <a:spcPts val="2436"/>
-              </a:lnSpc>
-              <a:buNone/>
-            </a:pPr>
-            <a:r>
-              <a:rPr lang="en-US" sz="1949" b="1" dirty="0">
-                <a:solidFill>
-                  <a:srgbClr val="F0FCFF"/>
-                </a:solidFill>
-                <a:latin typeface="Spline Sans" pitchFamily="34" charset="0"/>
-                <a:ea typeface="Spline Sans" pitchFamily="34" charset="-122"/>
-                <a:cs typeface="Spline Sans" pitchFamily="34" charset="-120"/>
-              </a:rPr>
-              <a:t>Réalité Augmentée et Robotique Médicale</a:t>
-            </a:r>
-            <a:endParaRPr lang="en-US" sz="1949" dirty="0"/>
-          </a:p>
-        </p:txBody>
-      </p:sp>
-      <p:sp>
-        <p:nvSpPr>
-          <p:cNvPr id="10" name="Text 7"/>
-          <p:cNvSpPr/>
-          <p:nvPr/>
-        </p:nvSpPr>
-        <p:spPr>
-          <a:xfrm>
-            <a:off x="7571780" y="3712845"/>
-            <a:ext cx="1727716" cy="3167063"/>
-          </a:xfrm>
-          <a:prstGeom prst="rect">
-            <a:avLst/>
-          </a:prstGeom>
-          <a:noFill/>
-          <a:ln/>
-        </p:spPr>
-        <p:txBody>
-          <a:bodyPr wrap="square" rtlCol="0" anchor="t"/>
-          <a:lstStyle/>
-          <a:p>
-            <a:pPr marL="0" indent="0">
-              <a:lnSpc>
-                <a:spcPts val="2494"/>
-              </a:lnSpc>
-              <a:buNone/>
-            </a:pPr>
-            <a:r>
-              <a:rPr lang="en-US" sz="1559" dirty="0">
-                <a:solidFill>
-                  <a:srgbClr val="E0E4E6"/>
-                </a:solidFill>
-                <a:latin typeface="Barlow" pitchFamily="34" charset="0"/>
-                <a:ea typeface="Barlow" pitchFamily="34" charset="-122"/>
-                <a:cs typeface="Barlow" pitchFamily="34" charset="-120"/>
-              </a:rPr>
-              <a:t>La réalité augmentée a été développée en 2023 pour assister les professionnels de santé, et la robotique médicale a été intégrée en 2024 pour les tâches critiques.</a:t>
-            </a:r>
-            <a:endParaRPr lang="en-US" sz="1559" dirty="0"/>
-          </a:p>
-        </p:txBody>
-      </p:sp>
-      <p:sp>
-        <p:nvSpPr>
-          <p:cNvPr id="11" name="Text 8"/>
-          <p:cNvSpPr/>
-          <p:nvPr/>
-        </p:nvSpPr>
-        <p:spPr>
-          <a:xfrm>
-            <a:off x="9790033" y="2277666"/>
-            <a:ext cx="1727716" cy="1546622"/>
-          </a:xfrm>
-          <a:prstGeom prst="rect">
-            <a:avLst/>
-          </a:prstGeom>
-          <a:noFill/>
-          <a:ln/>
-        </p:spPr>
-        <p:txBody>
-          <a:bodyPr wrap="square" rtlCol="0" anchor="t"/>
-          <a:lstStyle/>
-          <a:p>
-            <a:pPr marL="0" indent="0">
-              <a:lnSpc>
-                <a:spcPts val="2436"/>
-              </a:lnSpc>
-              <a:buNone/>
-            </a:pPr>
-            <a:r>
-              <a:rPr lang="en-US" sz="1949" b="1" dirty="0">
-                <a:solidFill>
-                  <a:srgbClr val="F0FCFF"/>
-                </a:solidFill>
-                <a:latin typeface="Spline Sans" pitchFamily="34" charset="0"/>
-                <a:ea typeface="Spline Sans" pitchFamily="34" charset="-122"/>
-                <a:cs typeface="Spline Sans" pitchFamily="34" charset="-120"/>
-              </a:rPr>
-              <a:t>Médecine Personnalisée et Technologies de Prédiction</a:t>
-            </a:r>
-            <a:endParaRPr lang="en-US" sz="1949" dirty="0"/>
-          </a:p>
-        </p:txBody>
-      </p:sp>
-      <p:sp>
-        <p:nvSpPr>
-          <p:cNvPr id="12" name="Text 9"/>
-          <p:cNvSpPr/>
-          <p:nvPr/>
-        </p:nvSpPr>
-        <p:spPr>
-          <a:xfrm>
-            <a:off x="9790033" y="4022169"/>
-            <a:ext cx="1727716" cy="3483769"/>
-          </a:xfrm>
-          <a:prstGeom prst="rect">
-            <a:avLst/>
-          </a:prstGeom>
-          <a:noFill/>
-          <a:ln/>
-        </p:spPr>
-        <p:txBody>
-          <a:bodyPr wrap="square" rtlCol="0" anchor="t"/>
-          <a:lstStyle/>
-          <a:p>
-            <a:pPr marL="0" indent="0">
-              <a:lnSpc>
-                <a:spcPts val="2494"/>
-              </a:lnSpc>
-              <a:buNone/>
-            </a:pPr>
-            <a:r>
-              <a:rPr lang="en-US" sz="1559" dirty="0">
-                <a:solidFill>
-                  <a:srgbClr val="E0E4E6"/>
-                </a:solidFill>
-                <a:latin typeface="Barlow" pitchFamily="34" charset="0"/>
-                <a:ea typeface="Barlow" pitchFamily="34" charset="-122"/>
-                <a:cs typeface="Barlow" pitchFamily="34" charset="-120"/>
-              </a:rPr>
-              <a:t>En 2023, la médecine personnalisée était une priorité, tandis qu'en 2024, Vigicare a investi dans des outils d'analyse prédictive pour anticiper les besoins des patients.</a:t>
-            </a:r>
-            <a:endParaRPr lang="en-US" sz="1559" dirty="0"/>
-          </a:p>
-        </p:txBody>
-      </p:sp>
-    </p:spTree>
-  </p:cSld>
-  <p:clrMapOvr>
-    <a:masterClrMapping/>
-  </p:clrMapOvr>
-</p:sld>
-</file>
-
-<file path=ppt/slides/slide6.xml><?xml version="1.0" encoding="utf-8"?>
-<p:sld xmlns:a="http://schemas.openxmlformats.org/drawingml/2006/main" xmlns:r="http://schemas.openxmlformats.org/officeDocument/2006/relationships" xmlns:p="http://schemas.openxmlformats.org/presentationml/2006/main">
-  <p:cSld name="Slide 6">
-    <p:spTree>
-      <p:nvGrpSpPr>
-        <p:cNvPr id="1" name=""/>
-        <p:cNvGrpSpPr/>
-        <p:nvPr/>
-      </p:nvGrpSpPr>
-      <p:grpSpPr>
-        <a:xfrm>
-          <a:off x="0" y="0"/>
-          <a:ext cx="0" cy="0"/>
-          <a:chOff x="0" y="0"/>
-          <a:chExt cx="0" cy="0"/>
-        </a:xfrm>
-      </p:grpSpPr>
-      <p:pic>
-        <p:nvPicPr>
-          <p:cNvPr id="2" name="Image 0" descr="preencoded.png"/>
-          <p:cNvPicPr>
-            <a:picLocks noChangeAspect="1"/>
-          </p:cNvPicPr>
-          <p:nvPr/>
-        </p:nvPicPr>
-        <p:blipFill>
-          <a:blip r:embed="rId3"/>
-          <a:stretch>
-            <a:fillRect/>
-          </a:stretch>
-        </p:blipFill>
-        <p:spPr>
-          <a:xfrm>
-            <a:off x="0" y="0"/>
-            <a:ext cx="14630400" cy="8229600"/>
-          </a:xfrm>
-          <a:prstGeom prst="rect">
-            <a:avLst/>
-          </a:prstGeom>
-        </p:spPr>
-      </p:pic>
-      <p:sp>
-        <p:nvSpPr>
-          <p:cNvPr id="3" name="Shape 0"/>
-          <p:cNvSpPr/>
-          <p:nvPr/>
-        </p:nvSpPr>
-        <p:spPr>
-          <a:xfrm>
-            <a:off x="0" y="0"/>
-            <a:ext cx="14630400" cy="8229600"/>
-          </a:xfrm>
-          <a:prstGeom prst="rect">
-            <a:avLst/>
-          </a:prstGeom>
-          <a:solidFill>
-            <a:srgbClr val="0A081B">
-              <a:alpha val="75000"/>
-            </a:srgbClr>
-          </a:solidFill>
-          <a:ln/>
-        </p:spPr>
-        <p:txBody>
-          <a:bodyPr/>
-          <a:lstStyle/>
-          <a:p>
-            <a:endParaRPr lang="fr-FR"/>
-          </a:p>
-        </p:txBody>
-      </p:sp>
-      <p:sp>
-        <p:nvSpPr>
-          <p:cNvPr id="4" name="Text 1"/>
-          <p:cNvSpPr/>
-          <p:nvPr/>
-        </p:nvSpPr>
-        <p:spPr>
-          <a:xfrm>
-            <a:off x="2624376" y="1637824"/>
-            <a:ext cx="8437007" cy="694373"/>
-          </a:xfrm>
-          <a:prstGeom prst="rect">
-            <a:avLst/>
-          </a:prstGeom>
-          <a:noFill/>
-          <a:ln/>
-        </p:spPr>
-        <p:txBody>
-          <a:bodyPr wrap="none" rtlCol="0" anchor="t"/>
-          <a:lstStyle/>
-          <a:p>
-            <a:pPr marL="0" indent="0">
-              <a:lnSpc>
-                <a:spcPts val="5468"/>
-              </a:lnSpc>
-              <a:buNone/>
-            </a:pPr>
-            <a:r>
-              <a:rPr lang="en-US" sz="4374" b="1" dirty="0">
-                <a:solidFill>
-                  <a:srgbClr val="F0FCFF"/>
-                </a:solidFill>
-                <a:latin typeface="Spline Sans" pitchFamily="34" charset="0"/>
-                <a:ea typeface="Spline Sans" pitchFamily="34" charset="-122"/>
-                <a:cs typeface="Spline Sans" pitchFamily="34" charset="-120"/>
-              </a:rPr>
-              <a:t>Innovations technologiques clés</a:t>
-            </a:r>
-            <a:endParaRPr lang="en-US" sz="4374" dirty="0"/>
-          </a:p>
-        </p:txBody>
-      </p:sp>
-      <p:sp>
-        <p:nvSpPr>
-          <p:cNvPr id="5" name="Shape 2"/>
-          <p:cNvSpPr/>
-          <p:nvPr/>
-        </p:nvSpPr>
-        <p:spPr>
-          <a:xfrm>
-            <a:off x="2624376" y="2950131"/>
-            <a:ext cx="499943" cy="499943"/>
-          </a:xfrm>
-          <a:prstGeom prst="roundRect">
-            <a:avLst>
-              <a:gd name="adj" fmla="val 80001"/>
-            </a:avLst>
-          </a:prstGeom>
-          <a:solidFill>
-            <a:srgbClr val="0A081B"/>
-          </a:solidFill>
-          <a:ln w="22860">
-            <a:solidFill>
-              <a:srgbClr val="E0E4E6"/>
-            </a:solidFill>
-            <a:prstDash val="solid"/>
-          </a:ln>
-        </p:spPr>
-        <p:txBody>
-          <a:bodyPr/>
-          <a:lstStyle/>
-          <a:p>
-            <a:endParaRPr lang="fr-FR"/>
-          </a:p>
-        </p:txBody>
-      </p:sp>
-      <p:sp>
-        <p:nvSpPr>
-          <p:cNvPr id="6" name="Text 3"/>
-          <p:cNvSpPr/>
-          <p:nvPr/>
-        </p:nvSpPr>
-        <p:spPr>
-          <a:xfrm>
-            <a:off x="2802255" y="2991803"/>
-            <a:ext cx="144185" cy="416481"/>
-          </a:xfrm>
-          <a:prstGeom prst="rect">
-            <a:avLst/>
-          </a:prstGeom>
-          <a:noFill/>
-          <a:ln/>
-        </p:spPr>
-        <p:txBody>
-          <a:bodyPr wrap="none" rtlCol="0" anchor="t"/>
-          <a:lstStyle/>
-          <a:p>
-            <a:pPr marL="0" indent="0" algn="ctr">
-              <a:lnSpc>
-                <a:spcPts val="3281"/>
-              </a:lnSpc>
-              <a:buNone/>
-            </a:pPr>
-            <a:r>
-              <a:rPr lang="en-US" sz="2624" b="1" dirty="0">
-                <a:solidFill>
-                  <a:srgbClr val="16FFBB"/>
-                </a:solidFill>
-                <a:latin typeface="Spline Sans" pitchFamily="34" charset="0"/>
-                <a:ea typeface="Spline Sans" pitchFamily="34" charset="-122"/>
-                <a:cs typeface="Spline Sans" pitchFamily="34" charset="-120"/>
-              </a:rPr>
-              <a:t>1</a:t>
-            </a:r>
-            <a:endParaRPr lang="en-US" sz="2624" dirty="0"/>
-          </a:p>
-        </p:txBody>
-      </p:sp>
-      <p:sp>
-        <p:nvSpPr>
-          <p:cNvPr id="7" name="Text 4"/>
-          <p:cNvSpPr/>
-          <p:nvPr/>
-        </p:nvSpPr>
-        <p:spPr>
-          <a:xfrm>
-            <a:off x="3346490" y="3026450"/>
-            <a:ext cx="2777490" cy="347186"/>
-          </a:xfrm>
-          <a:prstGeom prst="rect">
-            <a:avLst/>
-          </a:prstGeom>
-          <a:noFill/>
-          <a:ln/>
-        </p:spPr>
-        <p:txBody>
-          <a:bodyPr wrap="none" rtlCol="0" anchor="t"/>
-          <a:lstStyle/>
-          <a:p>
-            <a:pPr marL="0" indent="0">
-              <a:lnSpc>
-                <a:spcPts val="2734"/>
-              </a:lnSpc>
-              <a:buNone/>
-            </a:pPr>
-            <a:r>
-              <a:rPr lang="en-US" sz="2187" b="1" dirty="0">
-                <a:solidFill>
-                  <a:srgbClr val="16FFBB"/>
-                </a:solidFill>
-                <a:latin typeface="Spline Sans" pitchFamily="34" charset="0"/>
-                <a:ea typeface="Spline Sans" pitchFamily="34" charset="-122"/>
-                <a:cs typeface="Spline Sans" pitchFamily="34" charset="-120"/>
-              </a:rPr>
-              <a:t>Plateforme Intégrée</a:t>
-            </a:r>
-            <a:endParaRPr lang="en-US" sz="2187" dirty="0"/>
-          </a:p>
-        </p:txBody>
-      </p:sp>
-      <p:sp>
-        <p:nvSpPr>
-          <p:cNvPr id="8" name="Text 5"/>
-          <p:cNvSpPr/>
-          <p:nvPr/>
-        </p:nvSpPr>
-        <p:spPr>
-          <a:xfrm>
-            <a:off x="3346490" y="3506867"/>
-            <a:ext cx="3857625" cy="1066205"/>
-          </a:xfrm>
-          <a:prstGeom prst="rect">
-            <a:avLst/>
-          </a:prstGeom>
-          <a:noFill/>
-          <a:ln/>
-        </p:spPr>
-        <p:txBody>
-          <a:bodyPr wrap="square" rtlCol="0" anchor="t"/>
-          <a:lstStyle/>
-          <a:p>
-            <a:pPr marL="0" indent="0">
-              <a:lnSpc>
-                <a:spcPts val="2799"/>
-              </a:lnSpc>
-              <a:buNone/>
-            </a:pPr>
-            <a:r>
-              <a:rPr lang="en-US" sz="1750" dirty="0">
-                <a:solidFill>
-                  <a:srgbClr val="E0E4E6"/>
-                </a:solidFill>
-                <a:latin typeface="Barlow" pitchFamily="34" charset="0"/>
-                <a:ea typeface="Barlow" pitchFamily="34" charset="-122"/>
-                <a:cs typeface="Barlow" pitchFamily="34" charset="-120"/>
-              </a:rPr>
-              <a:t>Vigicare a développé une plateforme unique combinant des outils de suivi, de diagnostic et de traitement.</a:t>
-            </a:r>
-            <a:endParaRPr lang="en-US" sz="1750" dirty="0"/>
-          </a:p>
-        </p:txBody>
-      </p:sp>
-      <p:sp>
-        <p:nvSpPr>
-          <p:cNvPr id="9" name="Shape 6"/>
-          <p:cNvSpPr/>
-          <p:nvPr/>
-        </p:nvSpPr>
-        <p:spPr>
-          <a:xfrm>
-            <a:off x="7426285" y="2950131"/>
-            <a:ext cx="499943" cy="499943"/>
-          </a:xfrm>
-          <a:prstGeom prst="roundRect">
-            <a:avLst>
-              <a:gd name="adj" fmla="val 80001"/>
-            </a:avLst>
-          </a:prstGeom>
-          <a:solidFill>
-            <a:srgbClr val="0A081B"/>
-          </a:solidFill>
-          <a:ln w="22860">
-            <a:solidFill>
-              <a:srgbClr val="E0E4E6"/>
-            </a:solidFill>
-            <a:prstDash val="solid"/>
-          </a:ln>
-        </p:spPr>
-        <p:txBody>
-          <a:bodyPr/>
-          <a:lstStyle/>
-          <a:p>
-            <a:endParaRPr lang="fr-FR"/>
-          </a:p>
-        </p:txBody>
-      </p:sp>
-      <p:sp>
-        <p:nvSpPr>
-          <p:cNvPr id="10" name="Text 7"/>
-          <p:cNvSpPr/>
-          <p:nvPr/>
-        </p:nvSpPr>
-        <p:spPr>
-          <a:xfrm>
-            <a:off x="7583567" y="2991803"/>
-            <a:ext cx="185380" cy="416481"/>
-          </a:xfrm>
-          <a:prstGeom prst="rect">
-            <a:avLst/>
-          </a:prstGeom>
-          <a:noFill/>
-          <a:ln/>
-        </p:spPr>
-        <p:txBody>
-          <a:bodyPr wrap="none" rtlCol="0" anchor="t"/>
-          <a:lstStyle/>
-          <a:p>
-            <a:pPr marL="0" indent="0" algn="ctr">
-              <a:lnSpc>
-                <a:spcPts val="3281"/>
-              </a:lnSpc>
-              <a:buNone/>
-            </a:pPr>
-            <a:r>
-              <a:rPr lang="en-US" sz="2624" b="1" dirty="0">
-                <a:solidFill>
-                  <a:srgbClr val="29DDDA"/>
-                </a:solidFill>
-                <a:latin typeface="Spline Sans" pitchFamily="34" charset="0"/>
-                <a:ea typeface="Spline Sans" pitchFamily="34" charset="-122"/>
-                <a:cs typeface="Spline Sans" pitchFamily="34" charset="-120"/>
-              </a:rPr>
-              <a:t>2</a:t>
-            </a:r>
-            <a:endParaRPr lang="en-US" sz="2624" dirty="0"/>
-          </a:p>
-        </p:txBody>
-      </p:sp>
-      <p:sp>
-        <p:nvSpPr>
-          <p:cNvPr id="11" name="Text 8"/>
-          <p:cNvSpPr/>
-          <p:nvPr/>
-        </p:nvSpPr>
-        <p:spPr>
-          <a:xfrm>
-            <a:off x="8148399" y="3026450"/>
-            <a:ext cx="2777490" cy="347186"/>
-          </a:xfrm>
-          <a:prstGeom prst="rect">
-            <a:avLst/>
-          </a:prstGeom>
-          <a:noFill/>
-          <a:ln/>
-        </p:spPr>
-        <p:txBody>
-          <a:bodyPr wrap="none" rtlCol="0" anchor="t"/>
-          <a:lstStyle/>
-          <a:p>
-            <a:pPr marL="0" indent="0">
-              <a:lnSpc>
-                <a:spcPts val="2734"/>
-              </a:lnSpc>
-              <a:buNone/>
-            </a:pPr>
-            <a:r>
-              <a:rPr lang="en-US" sz="2187" b="1" dirty="0">
-                <a:solidFill>
-                  <a:srgbClr val="29DDDA"/>
-                </a:solidFill>
-                <a:latin typeface="Spline Sans" pitchFamily="34" charset="0"/>
-                <a:ea typeface="Spline Sans" pitchFamily="34" charset="-122"/>
-                <a:cs typeface="Spline Sans" pitchFamily="34" charset="-120"/>
-              </a:rPr>
-              <a:t>Analyse de Données</a:t>
-            </a:r>
-            <a:endParaRPr lang="en-US" sz="2187" dirty="0"/>
-          </a:p>
-        </p:txBody>
-      </p:sp>
-      <p:sp>
-        <p:nvSpPr>
-          <p:cNvPr id="12" name="Text 9"/>
-          <p:cNvSpPr/>
-          <p:nvPr/>
-        </p:nvSpPr>
-        <p:spPr>
-          <a:xfrm>
-            <a:off x="8148399" y="3506867"/>
-            <a:ext cx="3857625" cy="1066205"/>
-          </a:xfrm>
-          <a:prstGeom prst="rect">
-            <a:avLst/>
-          </a:prstGeom>
-          <a:noFill/>
-          <a:ln/>
-        </p:spPr>
-        <p:txBody>
-          <a:bodyPr wrap="square" rtlCol="0" anchor="t"/>
-          <a:lstStyle/>
-          <a:p>
-            <a:pPr marL="0" indent="0">
-              <a:lnSpc>
-                <a:spcPts val="2799"/>
-              </a:lnSpc>
-              <a:buNone/>
-            </a:pPr>
-            <a:r>
-              <a:rPr lang="en-US" sz="1750" dirty="0">
-                <a:solidFill>
-                  <a:srgbClr val="E0E4E6"/>
-                </a:solidFill>
-                <a:latin typeface="Barlow" pitchFamily="34" charset="0"/>
-                <a:ea typeface="Barlow" pitchFamily="34" charset="-122"/>
-                <a:cs typeface="Barlow" pitchFamily="34" charset="-120"/>
-              </a:rPr>
-              <a:t>Des algorithmes d'IA permettent une analyse approfondie des données de santé pour des diagnostics plus précis.</a:t>
-            </a:r>
-            <a:endParaRPr lang="en-US" sz="1750" dirty="0"/>
-          </a:p>
-        </p:txBody>
-      </p:sp>
-      <p:sp>
-        <p:nvSpPr>
-          <p:cNvPr id="13" name="Shape 10"/>
-          <p:cNvSpPr/>
-          <p:nvPr/>
-        </p:nvSpPr>
-        <p:spPr>
-          <a:xfrm>
-            <a:off x="2624376" y="4968835"/>
-            <a:ext cx="499943" cy="499943"/>
-          </a:xfrm>
-          <a:prstGeom prst="roundRect">
-            <a:avLst>
-              <a:gd name="adj" fmla="val 80001"/>
-            </a:avLst>
-          </a:prstGeom>
-          <a:solidFill>
-            <a:srgbClr val="0A081B"/>
-          </a:solidFill>
-          <a:ln w="22860">
-            <a:solidFill>
-              <a:srgbClr val="E0E4E6"/>
-            </a:solidFill>
-            <a:prstDash val="solid"/>
-          </a:ln>
-        </p:spPr>
-        <p:txBody>
-          <a:bodyPr/>
-          <a:lstStyle/>
-          <a:p>
-            <a:endParaRPr lang="fr-FR"/>
-          </a:p>
-        </p:txBody>
-      </p:sp>
-      <p:sp>
-        <p:nvSpPr>
-          <p:cNvPr id="14" name="Text 11"/>
-          <p:cNvSpPr/>
-          <p:nvPr/>
-        </p:nvSpPr>
-        <p:spPr>
-          <a:xfrm>
-            <a:off x="2776776" y="5010507"/>
-            <a:ext cx="195143" cy="416481"/>
-          </a:xfrm>
-          <a:prstGeom prst="rect">
-            <a:avLst/>
-          </a:prstGeom>
-          <a:noFill/>
-          <a:ln/>
-        </p:spPr>
-        <p:txBody>
-          <a:bodyPr wrap="none" rtlCol="0" anchor="t"/>
-          <a:lstStyle/>
-          <a:p>
-            <a:pPr marL="0" indent="0" algn="ctr">
-              <a:lnSpc>
-                <a:spcPts val="3281"/>
-              </a:lnSpc>
-              <a:buNone/>
-            </a:pPr>
-            <a:r>
-              <a:rPr lang="en-US" sz="2624" b="1" dirty="0">
-                <a:solidFill>
-                  <a:srgbClr val="37A7E7"/>
-                </a:solidFill>
-                <a:latin typeface="Spline Sans" pitchFamily="34" charset="0"/>
-                <a:ea typeface="Spline Sans" pitchFamily="34" charset="-122"/>
-                <a:cs typeface="Spline Sans" pitchFamily="34" charset="-120"/>
-              </a:rPr>
-              <a:t>3</a:t>
-            </a:r>
-            <a:endParaRPr lang="en-US" sz="2624" dirty="0"/>
-          </a:p>
-        </p:txBody>
-      </p:sp>
-      <p:sp>
-        <p:nvSpPr>
-          <p:cNvPr id="15" name="Text 12"/>
-          <p:cNvSpPr/>
-          <p:nvPr/>
-        </p:nvSpPr>
-        <p:spPr>
-          <a:xfrm>
-            <a:off x="3346490" y="5045154"/>
-            <a:ext cx="2777490" cy="347186"/>
-          </a:xfrm>
-          <a:prstGeom prst="rect">
-            <a:avLst/>
-          </a:prstGeom>
-          <a:noFill/>
-          <a:ln/>
-        </p:spPr>
-        <p:txBody>
-          <a:bodyPr wrap="none" rtlCol="0" anchor="t"/>
-          <a:lstStyle/>
-          <a:p>
-            <a:pPr marL="0" indent="0">
-              <a:lnSpc>
-                <a:spcPts val="2734"/>
-              </a:lnSpc>
-              <a:buNone/>
-            </a:pPr>
-            <a:r>
-              <a:rPr lang="en-US" sz="2187" b="1" dirty="0">
-                <a:solidFill>
-                  <a:srgbClr val="37A7E7"/>
-                </a:solidFill>
-                <a:latin typeface="Spline Sans" pitchFamily="34" charset="0"/>
-                <a:ea typeface="Spline Sans" pitchFamily="34" charset="-122"/>
-                <a:cs typeface="Spline Sans" pitchFamily="34" charset="-120"/>
-              </a:rPr>
-              <a:t>Expérience Patient</a:t>
-            </a:r>
-            <a:endParaRPr lang="en-US" sz="2187" dirty="0"/>
-          </a:p>
-        </p:txBody>
-      </p:sp>
-      <p:sp>
-        <p:nvSpPr>
-          <p:cNvPr id="16" name="Text 13"/>
-          <p:cNvSpPr/>
-          <p:nvPr/>
-        </p:nvSpPr>
-        <p:spPr>
-          <a:xfrm>
-            <a:off x="3346490" y="5525572"/>
-            <a:ext cx="3857625" cy="1066205"/>
-          </a:xfrm>
-          <a:prstGeom prst="rect">
-            <a:avLst/>
-          </a:prstGeom>
-          <a:noFill/>
-          <a:ln/>
-        </p:spPr>
-        <p:txBody>
-          <a:bodyPr wrap="square" rtlCol="0" anchor="t"/>
-          <a:lstStyle/>
-          <a:p>
-            <a:pPr marL="0" indent="0">
-              <a:lnSpc>
-                <a:spcPts val="2799"/>
-              </a:lnSpc>
-              <a:buNone/>
-            </a:pPr>
-            <a:r>
-              <a:rPr lang="en-US" sz="1750" dirty="0">
-                <a:solidFill>
-                  <a:srgbClr val="E0E4E6"/>
-                </a:solidFill>
-                <a:latin typeface="Barlow" pitchFamily="34" charset="0"/>
-                <a:ea typeface="Barlow" pitchFamily="34" charset="-122"/>
-                <a:cs typeface="Barlow" pitchFamily="34" charset="-120"/>
-              </a:rPr>
-              <a:t>Les solutions Vigicare visent à offrir une expérience patient intuitive et personnalisée.</a:t>
-            </a:r>
-            <a:endParaRPr lang="en-US" sz="1750" dirty="0"/>
-          </a:p>
-        </p:txBody>
-      </p:sp>
-      <p:sp>
-        <p:nvSpPr>
-          <p:cNvPr id="17" name="Shape 14"/>
-          <p:cNvSpPr/>
-          <p:nvPr/>
-        </p:nvSpPr>
-        <p:spPr>
-          <a:xfrm>
-            <a:off x="7426285" y="4968835"/>
-            <a:ext cx="499943" cy="499943"/>
-          </a:xfrm>
-          <a:prstGeom prst="roundRect">
-            <a:avLst>
-              <a:gd name="adj" fmla="val 80001"/>
-            </a:avLst>
-          </a:prstGeom>
-          <a:solidFill>
-            <a:srgbClr val="0A081B"/>
-          </a:solidFill>
-          <a:ln w="22860">
-            <a:solidFill>
-              <a:srgbClr val="E0E4E6"/>
-            </a:solidFill>
-            <a:prstDash val="solid"/>
-          </a:ln>
-        </p:spPr>
-        <p:txBody>
-          <a:bodyPr/>
-          <a:lstStyle/>
-          <a:p>
-            <a:endParaRPr lang="fr-FR"/>
-          </a:p>
-        </p:txBody>
-      </p:sp>
-      <p:sp>
-        <p:nvSpPr>
-          <p:cNvPr id="18" name="Text 15"/>
-          <p:cNvSpPr/>
-          <p:nvPr/>
-        </p:nvSpPr>
-        <p:spPr>
-          <a:xfrm>
-            <a:off x="7582019" y="5010507"/>
-            <a:ext cx="188357" cy="416481"/>
-          </a:xfrm>
-          <a:prstGeom prst="rect">
-            <a:avLst/>
-          </a:prstGeom>
-          <a:noFill/>
-          <a:ln/>
-        </p:spPr>
-        <p:txBody>
-          <a:bodyPr wrap="none" rtlCol="0" anchor="t"/>
-          <a:lstStyle/>
-          <a:p>
-            <a:pPr marL="0" indent="0" algn="ctr">
-              <a:lnSpc>
-                <a:spcPts val="3281"/>
-              </a:lnSpc>
-              <a:buNone/>
-            </a:pPr>
-            <a:r>
-              <a:rPr lang="en-US" sz="2624" b="1" dirty="0">
-                <a:solidFill>
-                  <a:srgbClr val="5372DF"/>
-                </a:solidFill>
-                <a:latin typeface="Spline Sans" pitchFamily="34" charset="0"/>
-                <a:ea typeface="Spline Sans" pitchFamily="34" charset="-122"/>
-                <a:cs typeface="Spline Sans" pitchFamily="34" charset="-120"/>
-              </a:rPr>
-              <a:t>4</a:t>
-            </a:r>
-            <a:endParaRPr lang="en-US" sz="2624" dirty="0"/>
-          </a:p>
-        </p:txBody>
-      </p:sp>
-      <p:sp>
-        <p:nvSpPr>
-          <p:cNvPr id="19" name="Text 16"/>
-          <p:cNvSpPr/>
-          <p:nvPr/>
-        </p:nvSpPr>
-        <p:spPr>
-          <a:xfrm>
-            <a:off x="8148399" y="5045154"/>
-            <a:ext cx="2777490" cy="347186"/>
-          </a:xfrm>
-          <a:prstGeom prst="rect">
-            <a:avLst/>
-          </a:prstGeom>
-          <a:noFill/>
-          <a:ln/>
-        </p:spPr>
-        <p:txBody>
-          <a:bodyPr wrap="none" rtlCol="0" anchor="t"/>
-          <a:lstStyle/>
-          <a:p>
-            <a:pPr marL="0" indent="0">
-              <a:lnSpc>
-                <a:spcPts val="2734"/>
-              </a:lnSpc>
-              <a:buNone/>
-            </a:pPr>
-            <a:r>
-              <a:rPr lang="en-US" sz="2187" b="1" dirty="0">
-                <a:solidFill>
-                  <a:srgbClr val="5372DF"/>
-                </a:solidFill>
-                <a:latin typeface="Spline Sans" pitchFamily="34" charset="0"/>
-                <a:ea typeface="Spline Sans" pitchFamily="34" charset="-122"/>
-                <a:cs typeface="Spline Sans" pitchFamily="34" charset="-120"/>
-              </a:rPr>
-              <a:t>Interopérabilité</a:t>
-            </a:r>
-            <a:endParaRPr lang="en-US" sz="2187" dirty="0"/>
-          </a:p>
-        </p:txBody>
-      </p:sp>
-      <p:sp>
-        <p:nvSpPr>
-          <p:cNvPr id="20" name="Text 17"/>
-          <p:cNvSpPr/>
-          <p:nvPr/>
-        </p:nvSpPr>
-        <p:spPr>
-          <a:xfrm>
-            <a:off x="8148399" y="5525572"/>
-            <a:ext cx="3857625" cy="1066205"/>
-          </a:xfrm>
-          <a:prstGeom prst="rect">
-            <a:avLst/>
-          </a:prstGeom>
-          <a:noFill/>
-          <a:ln/>
-        </p:spPr>
-        <p:txBody>
-          <a:bodyPr wrap="square" rtlCol="0" anchor="t"/>
-          <a:lstStyle/>
-          <a:p>
-            <a:pPr marL="0" indent="0">
-              <a:lnSpc>
-                <a:spcPts val="2799"/>
-              </a:lnSpc>
-              <a:buNone/>
-            </a:pPr>
-            <a:r>
-              <a:rPr lang="en-US" sz="1750" dirty="0">
-                <a:solidFill>
-                  <a:srgbClr val="E0E4E6"/>
-                </a:solidFill>
-                <a:latin typeface="Barlow" pitchFamily="34" charset="0"/>
-                <a:ea typeface="Barlow" pitchFamily="34" charset="-122"/>
-                <a:cs typeface="Barlow" pitchFamily="34" charset="-120"/>
-              </a:rPr>
-              <a:t>Les produits Vigicare s'intègrent facilement aux systèmes existants pour une prise en charge fluide.</a:t>
-            </a:r>
-            <a:endParaRPr lang="en-US" sz="1750" dirty="0"/>
-          </a:p>
-        </p:txBody>
-      </p:sp>
-    </p:spTree>
-  </p:cSld>
-  <p:clrMapOvr>
-    <a:masterClrMapping/>
-  </p:clrMapOvr>
-</p:sld>
-</file>
-
-<file path=ppt/slides/slide7.xml><?xml version="1.0" encoding="utf-8"?>
-<p:sld xmlns:a="http://schemas.openxmlformats.org/drawingml/2006/main" xmlns:r="http://schemas.openxmlformats.org/officeDocument/2006/relationships" xmlns:p="http://schemas.openxmlformats.org/presentationml/2006/main">
-  <p:cSld name="Slide 7">
-    <p:spTree>
-      <p:nvGrpSpPr>
-        <p:cNvPr id="1" name=""/>
-        <p:cNvGrpSpPr/>
-        <p:nvPr/>
-      </p:nvGrpSpPr>
-      <p:grpSpPr>
-        <a:xfrm>
-          <a:off x="0" y="0"/>
-          <a:ext cx="0" cy="0"/>
-          <a:chOff x="0" y="0"/>
-          <a:chExt cx="0" cy="0"/>
-        </a:xfrm>
-      </p:grpSpPr>
-      <p:pic>
-        <p:nvPicPr>
-          <p:cNvPr id="2" name="Image 0" descr="preencoded.png"/>
-          <p:cNvPicPr>
-            <a:picLocks noChangeAspect="1"/>
-          </p:cNvPicPr>
-          <p:nvPr/>
-        </p:nvPicPr>
-        <p:blipFill>
-          <a:blip r:embed="rId3"/>
-          <a:stretch>
-            <a:fillRect/>
-          </a:stretch>
-        </p:blipFill>
-        <p:spPr>
-          <a:xfrm>
-            <a:off x="0" y="0"/>
-            <a:ext cx="14630400" cy="8229600"/>
-          </a:xfrm>
-          <a:prstGeom prst="rect">
-            <a:avLst/>
-          </a:prstGeom>
-        </p:spPr>
-      </p:pic>
-      <p:sp>
-        <p:nvSpPr>
-          <p:cNvPr id="3" name="Shape 0"/>
-          <p:cNvSpPr/>
-          <p:nvPr/>
-        </p:nvSpPr>
-        <p:spPr>
-          <a:xfrm>
-            <a:off x="0" y="0"/>
-            <a:ext cx="14630400" cy="8229600"/>
-          </a:xfrm>
-          <a:prstGeom prst="rect">
-            <a:avLst/>
-          </a:prstGeom>
-          <a:solidFill>
-            <a:srgbClr val="0A081B">
-              <a:alpha val="75000"/>
-            </a:srgbClr>
-          </a:solidFill>
-          <a:ln/>
-        </p:spPr>
-        <p:txBody>
-          <a:bodyPr/>
-          <a:lstStyle/>
-          <a:p>
-            <a:endParaRPr lang="fr-FR"/>
-          </a:p>
-        </p:txBody>
-      </p:sp>
-      <p:sp>
-        <p:nvSpPr>
-          <p:cNvPr id="4" name="Text 1"/>
-          <p:cNvSpPr/>
-          <p:nvPr/>
-        </p:nvSpPr>
-        <p:spPr>
-          <a:xfrm>
-            <a:off x="2624376" y="1397675"/>
-            <a:ext cx="5697855" cy="694373"/>
-          </a:xfrm>
-          <a:prstGeom prst="rect">
-            <a:avLst/>
-          </a:prstGeom>
-          <a:noFill/>
-          <a:ln/>
-        </p:spPr>
-        <p:txBody>
-          <a:bodyPr wrap="none" rtlCol="0" anchor="t"/>
-          <a:lstStyle/>
-          <a:p>
-            <a:pPr marL="0" indent="0">
-              <a:lnSpc>
-                <a:spcPts val="5468"/>
-              </a:lnSpc>
-              <a:buNone/>
-            </a:pPr>
-            <a:r>
-              <a:rPr lang="en-US" sz="4374" b="1" dirty="0">
-                <a:solidFill>
-                  <a:srgbClr val="F0FCFF"/>
-                </a:solidFill>
-                <a:latin typeface="Spline Sans" pitchFamily="34" charset="0"/>
-                <a:ea typeface="Spline Sans" pitchFamily="34" charset="-122"/>
-                <a:cs typeface="Spline Sans" pitchFamily="34" charset="-120"/>
-              </a:rPr>
-              <a:t>Tendances du secteur</a:t>
-            </a:r>
-            <a:endParaRPr lang="en-US" sz="4374" dirty="0"/>
-          </a:p>
-        </p:txBody>
-      </p:sp>
-      <p:sp>
-        <p:nvSpPr>
-          <p:cNvPr id="5" name="Shape 2"/>
-          <p:cNvSpPr/>
-          <p:nvPr/>
-        </p:nvSpPr>
-        <p:spPr>
-          <a:xfrm>
-            <a:off x="2624376" y="2536388"/>
-            <a:ext cx="4579739" cy="2036683"/>
-          </a:xfrm>
-          <a:prstGeom prst="roundRect">
-            <a:avLst>
-              <a:gd name="adj" fmla="val 19638"/>
-            </a:avLst>
-          </a:prstGeom>
-          <a:solidFill>
-            <a:srgbClr val="0A081B"/>
-          </a:solidFill>
-          <a:ln w="22860">
-            <a:solidFill>
-              <a:srgbClr val="E0E4E6"/>
-            </a:solidFill>
-            <a:prstDash val="solid"/>
-          </a:ln>
-        </p:spPr>
-        <p:txBody>
-          <a:bodyPr/>
-          <a:lstStyle/>
-          <a:p>
-            <a:endParaRPr lang="fr-FR"/>
-          </a:p>
-        </p:txBody>
-      </p:sp>
-      <p:sp>
-        <p:nvSpPr>
-          <p:cNvPr id="6" name="Text 3"/>
-          <p:cNvSpPr/>
-          <p:nvPr/>
-        </p:nvSpPr>
-        <p:spPr>
-          <a:xfrm>
-            <a:off x="2869406" y="2781419"/>
-            <a:ext cx="2777490" cy="347186"/>
-          </a:xfrm>
-          <a:prstGeom prst="rect">
-            <a:avLst/>
-          </a:prstGeom>
-          <a:noFill/>
-          <a:ln/>
-        </p:spPr>
-        <p:txBody>
-          <a:bodyPr wrap="none" rtlCol="0" anchor="t"/>
-          <a:lstStyle/>
-          <a:p>
-            <a:pPr marL="0" indent="0">
-              <a:lnSpc>
-                <a:spcPts val="2734"/>
-              </a:lnSpc>
-              <a:buNone/>
-            </a:pPr>
-            <a:r>
-              <a:rPr lang="en-US" sz="2187" b="1" dirty="0">
-                <a:solidFill>
-                  <a:srgbClr val="16FFBB"/>
-                </a:solidFill>
-                <a:latin typeface="Spline Sans" pitchFamily="34" charset="0"/>
-                <a:ea typeface="Spline Sans" pitchFamily="34" charset="-122"/>
-                <a:cs typeface="Spline Sans" pitchFamily="34" charset="-120"/>
-              </a:rPr>
-              <a:t>Soins à Domicile</a:t>
-            </a:r>
-            <a:endParaRPr lang="en-US" sz="2187" dirty="0"/>
-          </a:p>
-        </p:txBody>
-      </p:sp>
-      <p:sp>
-        <p:nvSpPr>
-          <p:cNvPr id="7" name="Text 4"/>
-          <p:cNvSpPr/>
-          <p:nvPr/>
-        </p:nvSpPr>
-        <p:spPr>
-          <a:xfrm>
-            <a:off x="2869406" y="3261836"/>
-            <a:ext cx="4089678" cy="1066205"/>
-          </a:xfrm>
-          <a:prstGeom prst="rect">
-            <a:avLst/>
-          </a:prstGeom>
-          <a:noFill/>
-          <a:ln/>
-        </p:spPr>
-        <p:txBody>
-          <a:bodyPr wrap="square" rtlCol="0" anchor="t"/>
-          <a:lstStyle/>
-          <a:p>
-            <a:pPr marL="0" indent="0">
-              <a:lnSpc>
-                <a:spcPts val="2799"/>
-              </a:lnSpc>
-              <a:buNone/>
-            </a:pPr>
-            <a:r>
-              <a:rPr lang="en-US" sz="1750" dirty="0">
-                <a:solidFill>
-                  <a:srgbClr val="E0E4E6"/>
-                </a:solidFill>
-                <a:latin typeface="Barlow" pitchFamily="34" charset="0"/>
-                <a:ea typeface="Barlow" pitchFamily="34" charset="-122"/>
-                <a:cs typeface="Barlow" pitchFamily="34" charset="-120"/>
-              </a:rPr>
-              <a:t>La demande pour des solutions de santé à distance et à domicile ne cesse d'augmenter.</a:t>
-            </a:r>
-            <a:endParaRPr lang="en-US" sz="1750" dirty="0"/>
-          </a:p>
-        </p:txBody>
-      </p:sp>
-      <p:sp>
-        <p:nvSpPr>
-          <p:cNvPr id="8" name="Shape 5"/>
-          <p:cNvSpPr/>
-          <p:nvPr/>
-        </p:nvSpPr>
-        <p:spPr>
-          <a:xfrm>
-            <a:off x="7426285" y="2536388"/>
-            <a:ext cx="4579739" cy="2036683"/>
-          </a:xfrm>
-          <a:prstGeom prst="roundRect">
-            <a:avLst>
-              <a:gd name="adj" fmla="val 19638"/>
-            </a:avLst>
-          </a:prstGeom>
-          <a:solidFill>
-            <a:srgbClr val="0A081B"/>
-          </a:solidFill>
-          <a:ln w="22860">
-            <a:solidFill>
-              <a:srgbClr val="E0E4E6"/>
-            </a:solidFill>
-            <a:prstDash val="solid"/>
-          </a:ln>
-        </p:spPr>
-        <p:txBody>
-          <a:bodyPr/>
-          <a:lstStyle/>
-          <a:p>
-            <a:endParaRPr lang="fr-FR"/>
-          </a:p>
-        </p:txBody>
-      </p:sp>
-      <p:sp>
-        <p:nvSpPr>
-          <p:cNvPr id="9" name="Text 6"/>
-          <p:cNvSpPr/>
-          <p:nvPr/>
-        </p:nvSpPr>
-        <p:spPr>
-          <a:xfrm>
-            <a:off x="7671316" y="2781419"/>
-            <a:ext cx="2777490" cy="347186"/>
-          </a:xfrm>
-          <a:prstGeom prst="rect">
-            <a:avLst/>
-          </a:prstGeom>
-          <a:noFill/>
-          <a:ln/>
-        </p:spPr>
-        <p:txBody>
-          <a:bodyPr wrap="none" rtlCol="0" anchor="t"/>
-          <a:lstStyle/>
-          <a:p>
-            <a:pPr marL="0" indent="0">
-              <a:lnSpc>
-                <a:spcPts val="2734"/>
-              </a:lnSpc>
-              <a:buNone/>
-            </a:pPr>
-            <a:r>
-              <a:rPr lang="en-US" sz="2187" b="1" dirty="0">
-                <a:solidFill>
-                  <a:srgbClr val="29DDDA"/>
-                </a:solidFill>
-                <a:latin typeface="Spline Sans" pitchFamily="34" charset="0"/>
-                <a:ea typeface="Spline Sans" pitchFamily="34" charset="-122"/>
-                <a:cs typeface="Spline Sans" pitchFamily="34" charset="-120"/>
-              </a:rPr>
-              <a:t>Prévention</a:t>
-            </a:r>
-            <a:endParaRPr lang="en-US" sz="2187" dirty="0"/>
-          </a:p>
-        </p:txBody>
-      </p:sp>
-      <p:sp>
-        <p:nvSpPr>
-          <p:cNvPr id="10" name="Text 7"/>
-          <p:cNvSpPr/>
-          <p:nvPr/>
-        </p:nvSpPr>
-        <p:spPr>
-          <a:xfrm>
-            <a:off x="7671316" y="3261836"/>
-            <a:ext cx="4089678" cy="1066205"/>
-          </a:xfrm>
-          <a:prstGeom prst="rect">
-            <a:avLst/>
-          </a:prstGeom>
-          <a:noFill/>
-          <a:ln/>
-        </p:spPr>
-        <p:txBody>
-          <a:bodyPr wrap="square" rtlCol="0" anchor="t"/>
-          <a:lstStyle/>
-          <a:p>
-            <a:pPr marL="0" indent="0">
-              <a:lnSpc>
-                <a:spcPts val="2799"/>
-              </a:lnSpc>
-              <a:buNone/>
-            </a:pPr>
-            <a:r>
-              <a:rPr lang="en-US" sz="1750" dirty="0">
-                <a:solidFill>
-                  <a:srgbClr val="E0E4E6"/>
-                </a:solidFill>
-                <a:latin typeface="Barlow" pitchFamily="34" charset="0"/>
-                <a:ea typeface="Barlow" pitchFamily="34" charset="-122"/>
-                <a:cs typeface="Barlow" pitchFamily="34" charset="-120"/>
-              </a:rPr>
-              <a:t>Les patients s'intéressent davantage à la prévention et au bien-être grâce aux technologies connectées.</a:t>
-            </a:r>
-            <a:endParaRPr lang="en-US" sz="1750" dirty="0"/>
-          </a:p>
-        </p:txBody>
-      </p:sp>
-      <p:sp>
-        <p:nvSpPr>
-          <p:cNvPr id="11" name="Shape 8"/>
-          <p:cNvSpPr/>
-          <p:nvPr/>
-        </p:nvSpPr>
-        <p:spPr>
-          <a:xfrm>
-            <a:off x="2624376" y="4795242"/>
-            <a:ext cx="4579739" cy="2036683"/>
-          </a:xfrm>
-          <a:prstGeom prst="roundRect">
-            <a:avLst>
-              <a:gd name="adj" fmla="val 19638"/>
-            </a:avLst>
-          </a:prstGeom>
-          <a:solidFill>
-            <a:srgbClr val="0A081B"/>
-          </a:solidFill>
-          <a:ln w="22860">
-            <a:solidFill>
-              <a:srgbClr val="E0E4E6"/>
-            </a:solidFill>
-            <a:prstDash val="solid"/>
-          </a:ln>
-        </p:spPr>
-        <p:txBody>
-          <a:bodyPr/>
-          <a:lstStyle/>
-          <a:p>
-            <a:endParaRPr lang="fr-FR"/>
-          </a:p>
-        </p:txBody>
-      </p:sp>
-      <p:sp>
-        <p:nvSpPr>
-          <p:cNvPr id="12" name="Text 9"/>
-          <p:cNvSpPr/>
-          <p:nvPr/>
-        </p:nvSpPr>
-        <p:spPr>
-          <a:xfrm>
-            <a:off x="2869406" y="5040273"/>
-            <a:ext cx="2884646" cy="347186"/>
-          </a:xfrm>
-          <a:prstGeom prst="rect">
-            <a:avLst/>
-          </a:prstGeom>
-          <a:noFill/>
-          <a:ln/>
-        </p:spPr>
-        <p:txBody>
-          <a:bodyPr wrap="none" rtlCol="0" anchor="t"/>
-          <a:lstStyle/>
-          <a:p>
-            <a:pPr marL="0" indent="0">
-              <a:lnSpc>
-                <a:spcPts val="2734"/>
-              </a:lnSpc>
-              <a:buNone/>
-            </a:pPr>
-            <a:r>
-              <a:rPr lang="en-US" sz="2187" b="1" dirty="0">
-                <a:solidFill>
-                  <a:srgbClr val="37A7E7"/>
-                </a:solidFill>
-                <a:latin typeface="Spline Sans" pitchFamily="34" charset="0"/>
-                <a:ea typeface="Spline Sans" pitchFamily="34" charset="-122"/>
-                <a:cs typeface="Spline Sans" pitchFamily="34" charset="-120"/>
-              </a:rPr>
-              <a:t>Expérience Utilisateur</a:t>
-            </a:r>
-            <a:endParaRPr lang="en-US" sz="2187" dirty="0"/>
-          </a:p>
-        </p:txBody>
-      </p:sp>
-      <p:sp>
-        <p:nvSpPr>
-          <p:cNvPr id="13" name="Text 10"/>
-          <p:cNvSpPr/>
-          <p:nvPr/>
-        </p:nvSpPr>
-        <p:spPr>
-          <a:xfrm>
-            <a:off x="2869406" y="5520690"/>
-            <a:ext cx="4089678" cy="1066205"/>
-          </a:xfrm>
-          <a:prstGeom prst="rect">
-            <a:avLst/>
-          </a:prstGeom>
-          <a:noFill/>
-          <a:ln/>
-        </p:spPr>
-        <p:txBody>
-          <a:bodyPr wrap="square" rtlCol="0" anchor="t"/>
-          <a:lstStyle/>
-          <a:p>
-            <a:pPr marL="0" indent="0">
-              <a:lnSpc>
-                <a:spcPts val="2799"/>
-              </a:lnSpc>
-              <a:buNone/>
-            </a:pPr>
-            <a:r>
-              <a:rPr lang="en-US" sz="1750" dirty="0">
-                <a:solidFill>
-                  <a:srgbClr val="E0E4E6"/>
-                </a:solidFill>
-                <a:latin typeface="Barlow" pitchFamily="34" charset="0"/>
-                <a:ea typeface="Barlow" pitchFamily="34" charset="-122"/>
-                <a:cs typeface="Barlow" pitchFamily="34" charset="-120"/>
-              </a:rPr>
-              <a:t>L'accent est mis sur l'amélioration de l'expérience des patients et des professionnels de santé.</a:t>
-            </a:r>
-            <a:endParaRPr lang="en-US" sz="1750" dirty="0"/>
-          </a:p>
-        </p:txBody>
-      </p:sp>
-      <p:sp>
-        <p:nvSpPr>
-          <p:cNvPr id="14" name="Shape 11"/>
-          <p:cNvSpPr/>
-          <p:nvPr/>
-        </p:nvSpPr>
-        <p:spPr>
-          <a:xfrm>
-            <a:off x="7426285" y="4795242"/>
-            <a:ext cx="4579739" cy="2036683"/>
-          </a:xfrm>
-          <a:prstGeom prst="roundRect">
-            <a:avLst>
-              <a:gd name="adj" fmla="val 19638"/>
-            </a:avLst>
-          </a:prstGeom>
-          <a:solidFill>
-            <a:srgbClr val="0A081B"/>
-          </a:solidFill>
-          <a:ln w="22860">
-            <a:solidFill>
-              <a:srgbClr val="E0E4E6"/>
-            </a:solidFill>
-            <a:prstDash val="solid"/>
-          </a:ln>
-        </p:spPr>
-        <p:txBody>
-          <a:bodyPr/>
-          <a:lstStyle/>
-          <a:p>
-            <a:endParaRPr lang="fr-FR"/>
-          </a:p>
-        </p:txBody>
-      </p:sp>
-      <p:sp>
-        <p:nvSpPr>
-          <p:cNvPr id="15" name="Text 12"/>
-          <p:cNvSpPr/>
-          <p:nvPr/>
-        </p:nvSpPr>
-        <p:spPr>
-          <a:xfrm>
-            <a:off x="7671316" y="5040273"/>
-            <a:ext cx="2777490" cy="347186"/>
-          </a:xfrm>
-          <a:prstGeom prst="rect">
-            <a:avLst/>
-          </a:prstGeom>
-          <a:noFill/>
-          <a:ln/>
-        </p:spPr>
-        <p:txBody>
-          <a:bodyPr wrap="none" rtlCol="0" anchor="t"/>
-          <a:lstStyle/>
-          <a:p>
-            <a:pPr marL="0" indent="0">
-              <a:lnSpc>
-                <a:spcPts val="2734"/>
-              </a:lnSpc>
-              <a:buNone/>
-            </a:pPr>
-            <a:r>
-              <a:rPr lang="en-US" sz="2187" b="1" dirty="0">
-                <a:solidFill>
-                  <a:srgbClr val="5372DF"/>
-                </a:solidFill>
-                <a:latin typeface="Spline Sans" pitchFamily="34" charset="0"/>
-                <a:ea typeface="Spline Sans" pitchFamily="34" charset="-122"/>
-                <a:cs typeface="Spline Sans" pitchFamily="34" charset="-120"/>
-              </a:rPr>
-              <a:t>Analyse de Données</a:t>
-            </a:r>
-            <a:endParaRPr lang="en-US" sz="2187" dirty="0"/>
-          </a:p>
-        </p:txBody>
-      </p:sp>
-      <p:sp>
-        <p:nvSpPr>
-          <p:cNvPr id="16" name="Text 13"/>
-          <p:cNvSpPr/>
-          <p:nvPr/>
-        </p:nvSpPr>
-        <p:spPr>
-          <a:xfrm>
-            <a:off x="7671316" y="5520690"/>
-            <a:ext cx="4089678" cy="1066205"/>
-          </a:xfrm>
-          <a:prstGeom prst="rect">
-            <a:avLst/>
-          </a:prstGeom>
-          <a:noFill/>
-          <a:ln/>
-        </p:spPr>
-        <p:txBody>
-          <a:bodyPr wrap="square" rtlCol="0" anchor="t"/>
-          <a:lstStyle/>
-          <a:p>
-            <a:pPr marL="0" indent="0">
-              <a:lnSpc>
-                <a:spcPts val="2799"/>
-              </a:lnSpc>
-              <a:buNone/>
-            </a:pPr>
-            <a:r>
-              <a:rPr lang="en-US" sz="1750" dirty="0">
-                <a:solidFill>
-                  <a:srgbClr val="E0E4E6"/>
-                </a:solidFill>
-                <a:latin typeface="Barlow" pitchFamily="34" charset="0"/>
-                <a:ea typeface="Barlow" pitchFamily="34" charset="-122"/>
-                <a:cs typeface="Barlow" pitchFamily="34" charset="-120"/>
-              </a:rPr>
-              <a:t>L'exploitation des données de santé devient essentielle pour des soins plus personnalisés.</a:t>
-            </a:r>
-            <a:endParaRPr lang="en-US" sz="1750" dirty="0"/>
-          </a:p>
-        </p:txBody>
-      </p:sp>
-    </p:spTree>
-  </p:cSld>
-  <p:clrMapOvr>
-    <a:masterClrMapping/>
-  </p:clrMapOvr>
-</p:sld>
-</file>
-
-<file path=ppt/slides/slide8.xml><?xml version="1.0" encoding="utf-8"?>
-<p:sld xmlns:a="http://schemas.openxmlformats.org/drawingml/2006/main" xmlns:r="http://schemas.openxmlformats.org/officeDocument/2006/relationships" xmlns:p="http://schemas.openxmlformats.org/presentationml/2006/main">
-  <p:cSld name="Slide 9">
-    <p:spTree>
-      <p:nvGrpSpPr>
-        <p:cNvPr id="1" name=""/>
-        <p:cNvGrpSpPr/>
-        <p:nvPr/>
-      </p:nvGrpSpPr>
-      <p:grpSpPr>
-        <a:xfrm>
-          <a:off x="0" y="0"/>
-          <a:ext cx="0" cy="0"/>
-          <a:chOff x="0" y="0"/>
-          <a:chExt cx="0" cy="0"/>
-        </a:xfrm>
-      </p:grpSpPr>
-      <p:pic>
-        <p:nvPicPr>
-          <p:cNvPr id="2" name="Image 0" descr="preencoded.png"/>
-          <p:cNvPicPr>
-            <a:picLocks noChangeAspect="1"/>
-          </p:cNvPicPr>
-          <p:nvPr/>
-        </p:nvPicPr>
-        <p:blipFill>
-          <a:blip r:embed="rId3"/>
-          <a:stretch>
-            <a:fillRect/>
-          </a:stretch>
-        </p:blipFill>
-        <p:spPr>
-          <a:xfrm>
-            <a:off x="0" y="0"/>
-            <a:ext cx="14630400" cy="8229600"/>
-          </a:xfrm>
-          <a:prstGeom prst="rect">
-            <a:avLst/>
-          </a:prstGeom>
-        </p:spPr>
-      </p:pic>
-      <p:sp>
-        <p:nvSpPr>
-          <p:cNvPr id="3" name="Shape 0"/>
-          <p:cNvSpPr/>
-          <p:nvPr/>
-        </p:nvSpPr>
-        <p:spPr>
-          <a:xfrm>
-            <a:off x="30897" y="0"/>
-            <a:ext cx="14630400" cy="8229600"/>
-          </a:xfrm>
-          <a:prstGeom prst="rect">
-            <a:avLst/>
-          </a:prstGeom>
-          <a:solidFill>
-            <a:srgbClr val="0A081B">
-              <a:alpha val="75000"/>
-            </a:srgbClr>
-          </a:solidFill>
-          <a:ln/>
-        </p:spPr>
-        <p:txBody>
-          <a:bodyPr/>
-          <a:lstStyle/>
-          <a:p>
-            <a:endParaRPr lang="fr-FR" dirty="0"/>
-          </a:p>
-        </p:txBody>
-      </p:sp>
-      <p:pic>
-        <p:nvPicPr>
-          <p:cNvPr id="4" name="Image 1" descr="preencoded.png"/>
-          <p:cNvPicPr>
-            <a:picLocks noChangeAspect="1"/>
-          </p:cNvPicPr>
-          <p:nvPr/>
-        </p:nvPicPr>
-        <p:blipFill>
-          <a:blip r:embed="rId4"/>
-          <a:stretch>
-            <a:fillRect/>
-          </a:stretch>
-        </p:blipFill>
-        <p:spPr>
-          <a:xfrm>
-            <a:off x="0" y="0"/>
-            <a:ext cx="3657600" cy="8229600"/>
-          </a:xfrm>
-          <a:prstGeom prst="rect">
-            <a:avLst/>
-          </a:prstGeom>
-        </p:spPr>
-      </p:pic>
-      <p:sp>
-        <p:nvSpPr>
-          <p:cNvPr id="5" name="Text 1"/>
-          <p:cNvSpPr/>
-          <p:nvPr/>
-        </p:nvSpPr>
-        <p:spPr>
-          <a:xfrm>
-            <a:off x="4490799" y="934760"/>
-            <a:ext cx="7922181" cy="694373"/>
-          </a:xfrm>
-          <a:prstGeom prst="rect">
-            <a:avLst/>
-          </a:prstGeom>
-          <a:noFill/>
-          <a:ln/>
-        </p:spPr>
-        <p:txBody>
-          <a:bodyPr wrap="none" rtlCol="0" anchor="t"/>
-          <a:lstStyle/>
-          <a:p>
-            <a:pPr marL="0" indent="0">
-              <a:lnSpc>
-                <a:spcPts val="5468"/>
-              </a:lnSpc>
-              <a:buNone/>
-            </a:pPr>
-            <a:r>
-              <a:rPr lang="en-US" sz="4374" b="1" dirty="0">
-                <a:solidFill>
-                  <a:srgbClr val="F0FCFF"/>
-                </a:solidFill>
-                <a:latin typeface="Spline Sans" pitchFamily="34" charset="0"/>
-                <a:ea typeface="Spline Sans" pitchFamily="34" charset="-122"/>
-                <a:cs typeface="Spline Sans" pitchFamily="34" charset="-120"/>
-              </a:rPr>
-              <a:t>Défis technologiques à relever</a:t>
-            </a:r>
-            <a:endParaRPr lang="en-US" sz="4374" dirty="0"/>
-          </a:p>
-        </p:txBody>
-      </p:sp>
-      <p:pic>
-        <p:nvPicPr>
-          <p:cNvPr id="6" name="Image 2" descr="preencoded.png"/>
-          <p:cNvPicPr>
-            <a:picLocks noChangeAspect="1"/>
-          </p:cNvPicPr>
-          <p:nvPr/>
-        </p:nvPicPr>
-        <p:blipFill>
-          <a:blip r:embed="rId5"/>
-          <a:stretch>
-            <a:fillRect/>
-          </a:stretch>
-        </p:blipFill>
-        <p:spPr>
-          <a:xfrm>
-            <a:off x="4490799" y="1962388"/>
-            <a:ext cx="1110972" cy="1777484"/>
-          </a:xfrm>
-          <a:prstGeom prst="rect">
-            <a:avLst/>
-          </a:prstGeom>
-        </p:spPr>
-      </p:pic>
-      <p:sp>
-        <p:nvSpPr>
-          <p:cNvPr id="7" name="Text 2"/>
-          <p:cNvSpPr/>
-          <p:nvPr/>
-        </p:nvSpPr>
-        <p:spPr>
-          <a:xfrm>
-            <a:off x="5935028" y="2184559"/>
-            <a:ext cx="2822138" cy="347186"/>
-          </a:xfrm>
-          <a:prstGeom prst="rect">
-            <a:avLst/>
-          </a:prstGeom>
-          <a:noFill/>
-          <a:ln/>
-        </p:spPr>
-        <p:txBody>
-          <a:bodyPr wrap="none" rtlCol="0" anchor="t"/>
-          <a:lstStyle/>
-          <a:p>
-            <a:pPr marL="0" indent="0" algn="l">
-              <a:lnSpc>
-                <a:spcPts val="2734"/>
-              </a:lnSpc>
-              <a:buNone/>
-            </a:pPr>
-            <a:r>
-              <a:rPr lang="en-US" sz="2187" b="1" dirty="0">
-                <a:solidFill>
-                  <a:srgbClr val="16FFBB"/>
-                </a:solidFill>
-                <a:latin typeface="Spline Sans" pitchFamily="34" charset="0"/>
-                <a:ea typeface="Spline Sans" pitchFamily="34" charset="-122"/>
-                <a:cs typeface="Spline Sans" pitchFamily="34" charset="-120"/>
-              </a:rPr>
-              <a:t>Sécurité des Données</a:t>
-            </a:r>
-            <a:endParaRPr lang="en-US" sz="2187" dirty="0"/>
-          </a:p>
-        </p:txBody>
-      </p:sp>
-      <p:sp>
-        <p:nvSpPr>
-          <p:cNvPr id="8" name="Text 3"/>
-          <p:cNvSpPr/>
-          <p:nvPr/>
-        </p:nvSpPr>
-        <p:spPr>
-          <a:xfrm>
-            <a:off x="5935028" y="2664976"/>
-            <a:ext cx="7862173" cy="355402"/>
-          </a:xfrm>
-          <a:prstGeom prst="rect">
-            <a:avLst/>
-          </a:prstGeom>
-          <a:noFill/>
-          <a:ln/>
-        </p:spPr>
-        <p:txBody>
-          <a:bodyPr wrap="none" rtlCol="0" anchor="t"/>
-          <a:lstStyle/>
-          <a:p>
-            <a:pPr marL="0" indent="0" algn="l">
-              <a:lnSpc>
-                <a:spcPts val="2799"/>
-              </a:lnSpc>
-              <a:buNone/>
-            </a:pPr>
-            <a:r>
-              <a:rPr lang="en-US" sz="1750" dirty="0">
-                <a:solidFill>
-                  <a:srgbClr val="E0E4E6"/>
-                </a:solidFill>
-                <a:latin typeface="Barlow" pitchFamily="34" charset="0"/>
-                <a:ea typeface="Barlow" pitchFamily="34" charset="-122"/>
-                <a:cs typeface="Barlow" pitchFamily="34" charset="-120"/>
-              </a:rPr>
-              <a:t>Assurer la confidentialité et la protection des données de santé des patients.</a:t>
-            </a:r>
-            <a:endParaRPr lang="en-US" sz="1750" dirty="0"/>
-          </a:p>
-        </p:txBody>
-      </p:sp>
-      <p:pic>
-        <p:nvPicPr>
-          <p:cNvPr id="9" name="Image 3" descr="preencoded.png"/>
-          <p:cNvPicPr>
-            <a:picLocks noChangeAspect="1"/>
-          </p:cNvPicPr>
-          <p:nvPr/>
-        </p:nvPicPr>
-        <p:blipFill>
-          <a:blip r:embed="rId6"/>
-          <a:stretch>
-            <a:fillRect/>
-          </a:stretch>
-        </p:blipFill>
-        <p:spPr>
-          <a:xfrm>
-            <a:off x="4490799" y="3739872"/>
-            <a:ext cx="1110972" cy="1777484"/>
-          </a:xfrm>
-          <a:prstGeom prst="rect">
-            <a:avLst/>
-          </a:prstGeom>
-        </p:spPr>
-      </p:pic>
-      <p:sp>
-        <p:nvSpPr>
-          <p:cNvPr id="10" name="Text 4"/>
-          <p:cNvSpPr/>
-          <p:nvPr/>
-        </p:nvSpPr>
-        <p:spPr>
-          <a:xfrm>
-            <a:off x="5935028" y="3962043"/>
-            <a:ext cx="3319105" cy="347186"/>
-          </a:xfrm>
-          <a:prstGeom prst="rect">
-            <a:avLst/>
-          </a:prstGeom>
-          <a:noFill/>
-          <a:ln/>
-        </p:spPr>
-        <p:txBody>
-          <a:bodyPr wrap="none" rtlCol="0" anchor="t"/>
-          <a:lstStyle/>
-          <a:p>
-            <a:pPr marL="0" indent="0" algn="l">
-              <a:lnSpc>
-                <a:spcPts val="2734"/>
-              </a:lnSpc>
-              <a:buNone/>
-            </a:pPr>
-            <a:r>
-              <a:rPr lang="en-US" sz="2187" b="1" dirty="0">
-                <a:solidFill>
-                  <a:srgbClr val="29DDDA"/>
-                </a:solidFill>
-                <a:latin typeface="Spline Sans" pitchFamily="34" charset="0"/>
-                <a:ea typeface="Spline Sans" pitchFamily="34" charset="-122"/>
-                <a:cs typeface="Spline Sans" pitchFamily="34" charset="-120"/>
-              </a:rPr>
-              <a:t>Intégration des Systèmes</a:t>
-            </a:r>
-            <a:endParaRPr lang="en-US" sz="2187" dirty="0"/>
-          </a:p>
-        </p:txBody>
-      </p:sp>
-      <p:sp>
-        <p:nvSpPr>
-          <p:cNvPr id="11" name="Text 5"/>
-          <p:cNvSpPr/>
-          <p:nvPr/>
-        </p:nvSpPr>
-        <p:spPr>
-          <a:xfrm>
-            <a:off x="5935028" y="4442460"/>
-            <a:ext cx="7862173" cy="355402"/>
-          </a:xfrm>
-          <a:prstGeom prst="rect">
-            <a:avLst/>
-          </a:prstGeom>
-          <a:noFill/>
-          <a:ln/>
-        </p:spPr>
-        <p:txBody>
-          <a:bodyPr wrap="none" rtlCol="0" anchor="t"/>
-          <a:lstStyle/>
-          <a:p>
-            <a:pPr marL="0" indent="0" algn="l">
-              <a:lnSpc>
-                <a:spcPts val="2799"/>
-              </a:lnSpc>
-              <a:buNone/>
-            </a:pPr>
-            <a:r>
-              <a:rPr lang="en-US" sz="1750" dirty="0">
-                <a:solidFill>
-                  <a:srgbClr val="E0E4E6"/>
-                </a:solidFill>
-                <a:latin typeface="Barlow" pitchFamily="34" charset="0"/>
-                <a:ea typeface="Barlow" pitchFamily="34" charset="-122"/>
-                <a:cs typeface="Barlow" pitchFamily="34" charset="-120"/>
-              </a:rPr>
-              <a:t>Faciliter l'interopérabilité entre les différents outils et les systèmes existants.</a:t>
-            </a:r>
-            <a:endParaRPr lang="en-US" sz="1750" dirty="0"/>
-          </a:p>
-        </p:txBody>
-      </p:sp>
-      <p:pic>
-        <p:nvPicPr>
-          <p:cNvPr id="12" name="Image 4" descr="preencoded.png"/>
-          <p:cNvPicPr>
-            <a:picLocks noChangeAspect="1"/>
-          </p:cNvPicPr>
-          <p:nvPr/>
-        </p:nvPicPr>
-        <p:blipFill>
-          <a:blip r:embed="rId7"/>
-          <a:stretch>
-            <a:fillRect/>
-          </a:stretch>
-        </p:blipFill>
-        <p:spPr>
-          <a:xfrm>
-            <a:off x="4490799" y="5517356"/>
-            <a:ext cx="1110972" cy="1777484"/>
-          </a:xfrm>
-          <a:prstGeom prst="rect">
-            <a:avLst/>
-          </a:prstGeom>
-        </p:spPr>
-      </p:pic>
-      <p:sp>
-        <p:nvSpPr>
-          <p:cNvPr id="13" name="Text 6"/>
-          <p:cNvSpPr/>
-          <p:nvPr/>
-        </p:nvSpPr>
-        <p:spPr>
-          <a:xfrm>
-            <a:off x="5935028" y="5739527"/>
-            <a:ext cx="4090868" cy="347186"/>
-          </a:xfrm>
-          <a:prstGeom prst="rect">
-            <a:avLst/>
-          </a:prstGeom>
-          <a:noFill/>
-          <a:ln/>
-        </p:spPr>
-        <p:txBody>
-          <a:bodyPr wrap="none" rtlCol="0" anchor="t"/>
-          <a:lstStyle/>
-          <a:p>
-            <a:pPr marL="0" indent="0" algn="l">
-              <a:lnSpc>
-                <a:spcPts val="2734"/>
-              </a:lnSpc>
-              <a:buNone/>
-            </a:pPr>
-            <a:r>
-              <a:rPr lang="en-US" sz="2187" b="1" dirty="0">
-                <a:solidFill>
-                  <a:srgbClr val="37A7E7"/>
-                </a:solidFill>
-                <a:latin typeface="Spline Sans" pitchFamily="34" charset="0"/>
-                <a:ea typeface="Spline Sans" pitchFamily="34" charset="-122"/>
-                <a:cs typeface="Spline Sans" pitchFamily="34" charset="-120"/>
-              </a:rPr>
-              <a:t>Acceptation par les Utilisateurs</a:t>
-            </a:r>
-            <a:endParaRPr lang="en-US" sz="2187" dirty="0"/>
-          </a:p>
-        </p:txBody>
-      </p:sp>
-      <p:sp>
-        <p:nvSpPr>
-          <p:cNvPr id="14" name="Text 7"/>
-          <p:cNvSpPr/>
-          <p:nvPr/>
-        </p:nvSpPr>
-        <p:spPr>
-          <a:xfrm>
-            <a:off x="5935028" y="6219944"/>
-            <a:ext cx="7862173" cy="710803"/>
-          </a:xfrm>
-          <a:prstGeom prst="rect">
-            <a:avLst/>
-          </a:prstGeom>
-          <a:noFill/>
-          <a:ln/>
-        </p:spPr>
-        <p:txBody>
-          <a:bodyPr wrap="square" rtlCol="0" anchor="t"/>
-          <a:lstStyle/>
-          <a:p>
-            <a:pPr marL="0" indent="0" algn="l">
-              <a:lnSpc>
-                <a:spcPts val="2799"/>
-              </a:lnSpc>
-              <a:buNone/>
-            </a:pPr>
-            <a:r>
-              <a:rPr lang="en-US" sz="1750" dirty="0">
-                <a:solidFill>
-                  <a:srgbClr val="E0E4E6"/>
-                </a:solidFill>
-                <a:latin typeface="Barlow" pitchFamily="34" charset="0"/>
-                <a:ea typeface="Barlow" pitchFamily="34" charset="-122"/>
-                <a:cs typeface="Barlow" pitchFamily="34" charset="-120"/>
-              </a:rPr>
-              <a:t>Garantir une expérience utilisateur intuitive et engageante pour les patients et les professionnels.</a:t>
-            </a:r>
-            <a:endParaRPr lang="en-US" sz="1750" dirty="0"/>
-          </a:p>
-        </p:txBody>
-      </p:sp>
-    </p:spTree>
-  </p:cSld>
-  <p:clrMapOvr>
-    <a:masterClrMapping/>
-  </p:clrMapOvr>
-</p:sld>
-</file>
-
-<file path=ppt/slides/slide9.xml><?xml version="1.0" encoding="utf-8"?>
 <p:sld xmlns:a="http://schemas.openxmlformats.org/drawingml/2006/main" xmlns:r="http://schemas.openxmlformats.org/officeDocument/2006/relationships" xmlns:p="http://schemas.openxmlformats.org/presentationml/2006/main">
   <p:cSld name="Slide 10">
     <p:spTree>
@@ -6416,6 +3478,336 @@
                 <a:cs typeface="Barlow" pitchFamily="34" charset="-120"/>
               </a:rPr>
               <a:t>Vigicare développe des collaborations pour accélérer l'adoption de ses technologies innovantes.</a:t>
+            </a:r>
+            <a:endParaRPr lang="en-US" sz="1750" dirty="0"/>
+          </a:p>
+        </p:txBody>
+      </p:sp>
+    </p:spTree>
+  </p:cSld>
+  <p:clrMapOvr>
+    <a:masterClrMapping/>
+  </p:clrMapOvr>
+</p:sld>
+</file>
+
+<file path=ppt/slides/slide6.xml><?xml version="1.0" encoding="utf-8"?>
+<p:sld xmlns:a="http://schemas.openxmlformats.org/drawingml/2006/main" xmlns:r="http://schemas.openxmlformats.org/officeDocument/2006/relationships" xmlns:p="http://schemas.openxmlformats.org/presentationml/2006/main">
+  <p:cSld name="Slide 11">
+    <p:spTree>
+      <p:nvGrpSpPr>
+        <p:cNvPr id="1" name=""/>
+        <p:cNvGrpSpPr/>
+        <p:nvPr/>
+      </p:nvGrpSpPr>
+      <p:grpSpPr>
+        <a:xfrm>
+          <a:off x="0" y="0"/>
+          <a:ext cx="0" cy="0"/>
+          <a:chOff x="0" y="0"/>
+          <a:chExt cx="0" cy="0"/>
+        </a:xfrm>
+      </p:grpSpPr>
+      <p:pic>
+        <p:nvPicPr>
+          <p:cNvPr id="2" name="Image 0" descr="preencoded.png"/>
+          <p:cNvPicPr>
+            <a:picLocks noChangeAspect="1"/>
+          </p:cNvPicPr>
+          <p:nvPr/>
+        </p:nvPicPr>
+        <p:blipFill>
+          <a:blip r:embed="rId3"/>
+          <a:stretch>
+            <a:fillRect/>
+          </a:stretch>
+        </p:blipFill>
+        <p:spPr>
+          <a:xfrm>
+            <a:off x="0" y="0"/>
+            <a:ext cx="14630400" cy="8229600"/>
+          </a:xfrm>
+          <a:prstGeom prst="rect">
+            <a:avLst/>
+          </a:prstGeom>
+        </p:spPr>
+      </p:pic>
+      <p:sp>
+        <p:nvSpPr>
+          <p:cNvPr id="3" name="Shape 0"/>
+          <p:cNvSpPr/>
+          <p:nvPr/>
+        </p:nvSpPr>
+        <p:spPr>
+          <a:xfrm>
+            <a:off x="0" y="0"/>
+            <a:ext cx="14630400" cy="8229600"/>
+          </a:xfrm>
+          <a:prstGeom prst="rect">
+            <a:avLst/>
+          </a:prstGeom>
+          <a:solidFill>
+            <a:srgbClr val="0A081B">
+              <a:alpha val="75000"/>
+            </a:srgbClr>
+          </a:solidFill>
+          <a:ln/>
+        </p:spPr>
+        <p:txBody>
+          <a:bodyPr/>
+          <a:lstStyle/>
+          <a:p>
+            <a:endParaRPr lang="fr-FR"/>
+          </a:p>
+        </p:txBody>
+      </p:sp>
+      <p:sp>
+        <p:nvSpPr>
+          <p:cNvPr id="4" name="Text 1"/>
+          <p:cNvSpPr/>
+          <p:nvPr/>
+        </p:nvSpPr>
+        <p:spPr>
+          <a:xfrm>
+            <a:off x="2624376" y="2220992"/>
+            <a:ext cx="5554980" cy="694373"/>
+          </a:xfrm>
+          <a:prstGeom prst="rect">
+            <a:avLst/>
+          </a:prstGeom>
+          <a:noFill/>
+          <a:ln/>
+        </p:spPr>
+        <p:txBody>
+          <a:bodyPr wrap="none" rtlCol="0" anchor="t"/>
+          <a:lstStyle/>
+          <a:p>
+            <a:pPr marL="0" indent="0">
+              <a:lnSpc>
+                <a:spcPts val="5468"/>
+              </a:lnSpc>
+              <a:buNone/>
+            </a:pPr>
+            <a:r>
+              <a:rPr lang="en-US" sz="4374" b="1" dirty="0">
+                <a:solidFill>
+                  <a:srgbClr val="F0FCFF"/>
+                </a:solidFill>
+                <a:latin typeface="Spline Sans" pitchFamily="34" charset="0"/>
+                <a:ea typeface="Spline Sans" pitchFamily="34" charset="-122"/>
+                <a:cs typeface="Spline Sans" pitchFamily="34" charset="-120"/>
+              </a:rPr>
+              <a:t>Sources</a:t>
+            </a:r>
+            <a:endParaRPr lang="en-US" sz="4374" dirty="0"/>
+          </a:p>
+        </p:txBody>
+      </p:sp>
+      <p:sp>
+        <p:nvSpPr>
+          <p:cNvPr id="5" name="Text 2"/>
+          <p:cNvSpPr/>
+          <p:nvPr/>
+        </p:nvSpPr>
+        <p:spPr>
+          <a:xfrm>
+            <a:off x="2624376" y="3359706"/>
+            <a:ext cx="9381649" cy="710803"/>
+          </a:xfrm>
+          <a:prstGeom prst="rect">
+            <a:avLst/>
+          </a:prstGeom>
+          <a:noFill/>
+          <a:ln/>
+        </p:spPr>
+        <p:txBody>
+          <a:bodyPr wrap="square" rtlCol="0" anchor="t"/>
+          <a:lstStyle/>
+          <a:p>
+            <a:pPr marL="0" indent="0">
+              <a:lnSpc>
+                <a:spcPts val="2799"/>
+              </a:lnSpc>
+              <a:buNone/>
+            </a:pPr>
+            <a:r>
+              <a:rPr lang="en-US" sz="1750" dirty="0">
+                <a:solidFill>
+                  <a:srgbClr val="E0E4E6"/>
+                </a:solidFill>
+                <a:latin typeface="Barlow" pitchFamily="34" charset="0"/>
+                <a:ea typeface="Barlow" pitchFamily="34" charset="-122"/>
+                <a:cs typeface="Barlow" pitchFamily="34" charset="-120"/>
+              </a:rPr>
+              <a:t>Les informations présentées dans cette veille technologique proviennent de diverses sources fiables, notamment :</a:t>
+            </a:r>
+            <a:endParaRPr lang="en-US" sz="1750" dirty="0"/>
+          </a:p>
+        </p:txBody>
+      </p:sp>
+      <p:sp>
+        <p:nvSpPr>
+          <p:cNvPr id="6" name="Text 3"/>
+          <p:cNvSpPr/>
+          <p:nvPr/>
+        </p:nvSpPr>
+        <p:spPr>
+          <a:xfrm>
+            <a:off x="2979777" y="4320421"/>
+            <a:ext cx="9026247" cy="355402"/>
+          </a:xfrm>
+          <a:prstGeom prst="rect">
+            <a:avLst/>
+          </a:prstGeom>
+          <a:noFill/>
+          <a:ln/>
+        </p:spPr>
+        <p:txBody>
+          <a:bodyPr wrap="none" rtlCol="0" anchor="t"/>
+          <a:lstStyle/>
+          <a:p>
+            <a:pPr marL="342900" indent="-342900" algn="l">
+              <a:lnSpc>
+                <a:spcPts val="2799"/>
+              </a:lnSpc>
+              <a:buSzPct val="100000"/>
+              <a:buChar char="•"/>
+            </a:pPr>
+            <a:r>
+              <a:rPr lang="en-US" sz="1750" dirty="0">
+                <a:solidFill>
+                  <a:schemeClr val="bg1"/>
+                </a:solidFill>
+              </a:rPr>
+              <a:t>https://www.vigicare.org/guide-effets-indesirables-medicaments</a:t>
+            </a:r>
+          </a:p>
+        </p:txBody>
+      </p:sp>
+      <p:sp>
+        <p:nvSpPr>
+          <p:cNvPr id="7" name="Text 4"/>
+          <p:cNvSpPr/>
+          <p:nvPr/>
+        </p:nvSpPr>
+        <p:spPr>
+          <a:xfrm>
+            <a:off x="2979777" y="4764643"/>
+            <a:ext cx="9026247" cy="355402"/>
+          </a:xfrm>
+          <a:prstGeom prst="rect">
+            <a:avLst/>
+          </a:prstGeom>
+          <a:noFill/>
+          <a:ln/>
+        </p:spPr>
+        <p:txBody>
+          <a:bodyPr wrap="none" rtlCol="0" anchor="t"/>
+          <a:lstStyle/>
+          <a:p>
+            <a:pPr marL="342900" indent="-342900" algn="l">
+              <a:lnSpc>
+                <a:spcPts val="2799"/>
+              </a:lnSpc>
+              <a:buSzPct val="100000"/>
+              <a:buChar char="•"/>
+            </a:pPr>
+            <a:r>
+              <a:rPr lang="en-US" sz="1750" dirty="0">
+                <a:solidFill>
+                  <a:schemeClr val="bg1"/>
+                </a:solidFill>
+              </a:rPr>
+              <a:t>https://futurism.com/</a:t>
+            </a:r>
+          </a:p>
+        </p:txBody>
+      </p:sp>
+      <p:sp>
+        <p:nvSpPr>
+          <p:cNvPr id="8" name="Text 5"/>
+          <p:cNvSpPr/>
+          <p:nvPr/>
+        </p:nvSpPr>
+        <p:spPr>
+          <a:xfrm>
+            <a:off x="2979777" y="5208865"/>
+            <a:ext cx="9026247" cy="355402"/>
+          </a:xfrm>
+          <a:prstGeom prst="rect">
+            <a:avLst/>
+          </a:prstGeom>
+          <a:noFill/>
+          <a:ln/>
+        </p:spPr>
+        <p:txBody>
+          <a:bodyPr wrap="none" rtlCol="0" anchor="t"/>
+          <a:lstStyle/>
+          <a:p>
+            <a:pPr marL="342900" indent="-342900" algn="l">
+              <a:lnSpc>
+                <a:spcPts val="2799"/>
+              </a:lnSpc>
+              <a:buSzPct val="100000"/>
+              <a:buChar char="•"/>
+            </a:pPr>
+            <a:r>
+              <a:rPr lang="en-US" sz="1750" u="sng" dirty="0">
+                <a:solidFill>
+                  <a:schemeClr val="bg1"/>
+                </a:solidFill>
+                <a:latin typeface="Barlow" pitchFamily="34" charset="0"/>
+                <a:ea typeface="Barlow" pitchFamily="34" charset="-122"/>
+                <a:cs typeface="Barlow" pitchFamily="34" charset="-120"/>
+              </a:rPr>
+              <a:t>https://www.sciencedirect.com/science/article/abs/pii/S295043332400104</a:t>
+            </a:r>
+            <a:endParaRPr lang="en-US" sz="1750" dirty="0">
+              <a:solidFill>
+                <a:schemeClr val="bg1"/>
+              </a:solidFill>
+            </a:endParaRPr>
+          </a:p>
+        </p:txBody>
+      </p:sp>
+      <p:sp>
+        <p:nvSpPr>
+          <p:cNvPr id="9" name="Text 6"/>
+          <p:cNvSpPr/>
+          <p:nvPr/>
+        </p:nvSpPr>
+        <p:spPr>
+          <a:xfrm>
+            <a:off x="2979777" y="5653088"/>
+            <a:ext cx="9026247" cy="355402"/>
+          </a:xfrm>
+          <a:prstGeom prst="rect">
+            <a:avLst/>
+          </a:prstGeom>
+          <a:noFill/>
+          <a:ln/>
+        </p:spPr>
+        <p:txBody>
+          <a:bodyPr wrap="none" rtlCol="0" anchor="t"/>
+          <a:lstStyle/>
+          <a:p>
+            <a:pPr marL="342900" indent="-342900" algn="l">
+              <a:lnSpc>
+                <a:spcPts val="2799"/>
+              </a:lnSpc>
+              <a:buSzPct val="100000"/>
+              <a:buChar char="•"/>
+            </a:pPr>
+            <a:r>
+              <a:rPr lang="en-US" sz="1750" dirty="0">
+                <a:solidFill>
+                  <a:srgbClr val="E0E4E6"/>
+                </a:solidFill>
+                <a:latin typeface="Barlow" pitchFamily="34" charset="0"/>
+                <a:ea typeface="Barlow" pitchFamily="34" charset="-122"/>
+                <a:cs typeface="Barlow" pitchFamily="34" charset="-120"/>
+              </a:rPr>
+              <a:t>Forbes</a:t>
             </a:r>
             <a:endParaRPr lang="en-US" sz="1750" dirty="0"/>
           </a:p>
